--- a/Aula11_Definindo_Novos_Tipos/Aula11_Teoria_com_rastreamento.pptx
+++ b/Aula11_Definindo_Novos_Tipos/Aula11_Teoria_com_rastreamento.pptx
@@ -14,6 +14,7 @@
     <p:sldId id="261" r:id="rId7"/>
     <p:sldId id="264" r:id="rId15"/>
     <p:sldId id="262" r:id="rId8"/>
+    <p:sldId id="265" r:id="rId16"/>
   </p:sldIdLst>
   <p:notesMasterIdLst>
     <p:notesMasterId r:id="rId9"/>
@@ -1608,7 +1609,7 @@
                 <a:ea typeface="Calibri" pitchFamily="34" charset="-122"/>
                 <a:cs typeface="Calibri" pitchFamily="34" charset="-120"/>
               </a:rPr>
-              <a:t>AULA 11 DE 15</a:t>
+              <a:t>AULA 11 DE 15 · JULIA + PLUTO</a:t>
             </a:r>
             <a:endParaRPr lang="en-US" sz="1200" dirty="0"/>
           </a:p>
@@ -1689,6 +1690,231 @@
               <a:t>01 / 07</a:t>
             </a:r>
             <a:endParaRPr lang="en-US" sz="1000" dirty="0"/>
+          </a:p>
+        </p:txBody>
+      </p:sp>
+    </p:spTree>
+  </p:cSld>
+  <p:clrMapOvr>
+    <a:masterClrMapping/>
+  </p:clrMapOvr>
+</p:sld>
+</file>
+
+<file path=ppt/slides/slide10.xml><?xml version="1.0" encoding="utf-8"?>
+<p:sld xmlns:a="http://schemas.openxmlformats.org/drawingml/2006/main" xmlns:r="http://schemas.openxmlformats.org/officeDocument/2006/relationships" xmlns:p="http://schemas.openxmlformats.org/presentationml/2006/main">
+  <p:cSld name="Referencias">
+    <p:bg>
+      <p:bgPr>
+        <a:solidFill>
+          <a:srgbClr val="12233B"/>
+        </a:solidFill>
+      </p:bgPr>
+    </p:bg>
+    <p:spTree>
+      <p:nvGrpSpPr>
+        <p:cNvPr id="1" name=""/>
+        <p:cNvGrpSpPr/>
+        <p:nvPr/>
+      </p:nvGrpSpPr>
+      <p:grpSpPr>
+        <a:xfrm>
+          <a:off x="0" y="0"/>
+          <a:ext cx="0" cy="0"/>
+          <a:chOff x="0" y="0"/>
+          <a:chExt cx="0" cy="0"/>
+        </a:xfrm>
+      </p:grpSpPr>
+      <p:sp>
+        <p:nvSpPr>
+          <p:cNvPr id="900" name="Kicker"/>
+          <p:cNvSpPr/>
+          <p:nvPr/>
+        </p:nvSpPr>
+        <p:spPr>
+          <a:xfrm>
+            <a:off x="548640" y="548640"/>
+            <a:ext cx="10485120" cy="411480"/>
+          </a:xfrm>
+          <a:prstGeom prst="rect">
+            <a:avLst/>
+          </a:prstGeom>
+          <a:noFill/>
+          <a:ln/>
+        </p:spPr>
+        <p:txBody>
+          <a:bodyPr wrap="square" lIns="0" tIns="0" rIns="0" bIns="0" rtlCol="0" anchor="ctr"/>
+          <a:lstStyle/>
+          <a:p>
+            <a:pPr indent="0" marL="0">
+              <a:buNone/>
+            </a:pPr>
+            <a:r>
+              <a:rPr lang="pt-BR" sz="1200" b="1" spc="200" kern="0" dirty="0">
+                <a:solidFill>
+                  <a:srgbClr val="E8963C"/>
+                </a:solidFill>
+                <a:latin typeface="Calibri" pitchFamily="34" charset="0"/>
+                <a:ea typeface="Calibri" pitchFamily="34" charset="-122"/>
+                <a:cs typeface="Calibri" pitchFamily="34" charset="-120"/>
+              </a:rPr>
+              <a:t>REFERÊNCIAS</a:t>
+            </a:r>
+            <a:endParaRPr lang="pt-BR" sz="1200" dirty="0"/>
+          </a:p>
+        </p:txBody>
+      </p:sp>
+      <p:sp>
+        <p:nvSpPr>
+          <p:cNvPr id="901" name="Titulo"/>
+          <p:cNvSpPr/>
+          <p:nvPr/>
+        </p:nvSpPr>
+        <p:spPr>
+          <a:xfrm>
+            <a:off x="548640" y="1097280"/>
+            <a:ext cx="10485120" cy="754380"/>
+          </a:xfrm>
+          <a:prstGeom prst="rect">
+            <a:avLst/>
+          </a:prstGeom>
+          <a:noFill/>
+          <a:ln/>
+        </p:spPr>
+        <p:txBody>
+          <a:bodyPr wrap="square" lIns="0" tIns="0" rIns="0" bIns="0" rtlCol="0" anchor="ctr"/>
+          <a:lstStyle/>
+          <a:p>
+            <a:pPr indent="0" marL="0">
+              <a:buNone/>
+            </a:pPr>
+            <a:r>
+              <a:rPr lang="pt-BR" sz="3000" b="1" dirty="0">
+                <a:solidFill>
+                  <a:srgbClr val="FFFFFF"/>
+                </a:solidFill>
+                <a:latin typeface="Cambria" pitchFamily="34" charset="0"/>
+                <a:ea typeface="Cambria" pitchFamily="34" charset="-122"/>
+                <a:cs typeface="Cambria" pitchFamily="34" charset="-120"/>
+              </a:rPr>
+              <a:t>Referências</a:t>
+            </a:r>
+            <a:endParaRPr lang="pt-BR" sz="3000" dirty="0"/>
+          </a:p>
+        </p:txBody>
+      </p:sp>
+      <p:sp>
+        <p:nvSpPr>
+          <p:cNvPr id="902" name="Citacoes"/>
+          <p:cNvSpPr/>
+          <p:nvPr/>
+        </p:nvSpPr>
+        <p:spPr>
+          <a:xfrm>
+            <a:off x="548640" y="2057400"/>
+            <a:ext cx="10485120" cy="4114800"/>
+          </a:xfrm>
+          <a:prstGeom prst="rect">
+            <a:avLst/>
+          </a:prstGeom>
+          <a:noFill/>
+          <a:ln/>
+        </p:spPr>
+        <p:txBody>
+          <a:bodyPr wrap="square" lIns="0" tIns="0" rIns="0" bIns="0" rtlCol="0" anchor="t"/>
+          <a:lstStyle/>
+          <a:p>
+            <a:pPr indent="-228600" marL="228600">
+              <a:lnSpc>
+                <a:spcPct val="125000"/>
+              </a:lnSpc>
+              <a:spcAft>
+                <a:spcPts val="320"/>
+              </a:spcAft>
+              <a:buFont typeface="Arial"/>
+              <a:buNone/>
+            </a:pPr>
+            <a:r>
+              <a:rPr sz="1400" b="0">
+                <a:solidFill>
+                  <a:srgbClr val="E4ECF3"/>
+                </a:solidFill>
+                <a:latin typeface="Calibri"/>
+              </a:rPr>
+              <a:t>RIBEIRO, João Araújo. Introdução à Programação e aos algoritmos. Rio de Janeiro: LTC, 2019. ISBN 978-85-216-3640-3.</a:t>
+            </a:r>
+            <a:endParaRPr lang="pt-BR" sz="1400" dirty="0"/>
+          </a:p>
+          <a:p>
+            <a:pPr>
+              <a:spcBef>
+                <a:spcPts val="1400"/>
+              </a:spcBef>
+            </a:pPr>
+            <a:r>
+              <a:rPr sz="1400" b="0">
+                <a:solidFill>
+                  <a:srgbClr val="E4ECF3"/>
+                </a:solidFill>
+                <a:latin typeface="Calibri"/>
+              </a:rPr>
+              <a:t>FELLEISEN, Matthias; FINDLER, Robert Bruce; FLATT, Matthew; KRISHNAMURTHI, Shriram. How to Design Programs. The MIT Press, 2001. Disponível em: www.htdp.org.</a:t>
+            </a:r>
+          </a:p>
+          <a:p>
+            <a:pPr>
+              <a:spcBef>
+                <a:spcPts val="1400"/>
+              </a:spcBef>
+            </a:pPr>
+            <a:r>
+              <a:rPr sz="1400" b="0">
+                <a:solidFill>
+                  <a:srgbClr val="E4ECF3"/>
+                </a:solidFill>
+                <a:latin typeface="Calibri"/>
+              </a:rPr>
+              <a:t>RAABE, André; ZORZO, Avelino F.; BLIKSTEIN, Paulo. Computação na Educação Básica: Fundamentos e Experiências. Porto Alegre: Penso, 2020. Ebook. ISBN 9786581334048. Disponível em: https://integrada.minhabiblioteca.com.br/#/books/9786581334048.</a:t>
+            </a:r>
+          </a:p>
+        </p:txBody>
+      </p:sp>
+      <p:sp>
+        <p:nvSpPr>
+          <p:cNvPr id="903" name="Rodape"/>
+          <p:cNvSpPr/>
+          <p:nvPr/>
+        </p:nvSpPr>
+        <p:spPr>
+          <a:xfrm>
+            <a:off x="548640" y="6343650"/>
+            <a:ext cx="10485120" cy="342900"/>
+          </a:xfrm>
+          <a:prstGeom prst="rect">
+            <a:avLst/>
+          </a:prstGeom>
+          <a:noFill/>
+          <a:ln/>
+        </p:spPr>
+        <p:txBody>
+          <a:bodyPr wrap="square" lIns="0" tIns="0" rIns="0" bIns="0" rtlCol="0" anchor="ctr"/>
+          <a:lstStyle/>
+          <a:p>
+            <a:pPr indent="0" marL="0">
+              <a:buNone/>
+            </a:pPr>
+            <a:r>
+              <a:rPr lang="pt-BR" sz="900" dirty="0">
+                <a:solidFill>
+                  <a:srgbClr val="9AA5B1"/>
+                </a:solidFill>
+                <a:latin typeface="Calibri" pitchFamily="34" charset="0"/>
+                <a:ea typeface="Calibri" pitchFamily="34" charset="-122"/>
+                <a:cs typeface="Calibri" pitchFamily="34" charset="-120"/>
+              </a:rPr>
+              <a:t>Aula 11 · Definindo Novos Tipos</a:t>
+            </a:r>
+            <a:endParaRPr lang="pt-BR" sz="900" dirty="0"/>
           </a:p>
         </p:txBody>
       </p:sp>
@@ -2089,7 +2315,7 @@
                 <a:ea typeface="Calibri" pitchFamily="34" charset="-122"/>
                 <a:cs typeface="Calibri" pitchFamily="34" charset="-120"/>
               </a:rPr>
-              <a:t>EXEMPLO — DEFININDO UMA CATEGORIA</a:t>
+              <a:t>EXEMPLO EM JULIA — DEFININDO UMA CATEGORIA</a:t>
             </a:r>
             <a:endParaRPr lang="en-US" sz="1100" dirty="0"/>
           </a:p>
@@ -2160,7 +2386,7 @@
                 <a:ea typeface="Courier New" pitchFamily="34" charset="-122"/>
                 <a:cs typeface="Courier New" pitchFamily="34" charset="-120"/>
               </a:rPr>
-              <a:t>Pessoa</a:t>
+              <a:t>struct Pessoa</a:t>
             </a:r>
             <a:endParaRPr lang="en-US" sz="1600" dirty="0"/>
           </a:p>
@@ -2180,7 +2406,7 @@
                 <a:ea typeface="Courier New" pitchFamily="34" charset="-122"/>
                 <a:cs typeface="Courier New" pitchFamily="34" charset="-120"/>
               </a:rPr>
-              <a:t>    nome::Texto</a:t>
+              <a:t>    nome::String</a:t>
             </a:r>
             <a:endParaRPr lang="en-US" sz="1600" dirty="0"/>
           </a:p>
@@ -2200,7 +2426,7 @@
                 <a:ea typeface="Courier New" pitchFamily="34" charset="-122"/>
                 <a:cs typeface="Courier New" pitchFamily="34" charset="-120"/>
               </a:rPr>
-              <a:t>    idade::NúmeroInteiro</a:t>
+              <a:t>    idade::Int</a:t>
             </a:r>
             <a:endParaRPr lang="en-US" sz="1600" dirty="0"/>
           </a:p>
@@ -2220,7 +2446,7 @@
                 <a:ea typeface="Courier New" pitchFamily="34" charset="-122"/>
                 <a:cs typeface="Courier New" pitchFamily="34" charset="-120"/>
               </a:rPr>
-              <a:t>    email::Texto</a:t>
+              <a:t>    email::String</a:t>
             </a:r>
             <a:endParaRPr lang="en-US" sz="1600" dirty="0"/>
           </a:p>
@@ -2240,7 +2466,7 @@
                 <a:ea typeface="Courier New" pitchFamily="34" charset="-122"/>
                 <a:cs typeface="Courier New" pitchFamily="34" charset="-120"/>
               </a:rPr>
-              <a:t>fim</a:t>
+              <a:t>end</a:t>
             </a:r>
             <a:endParaRPr lang="en-US" sz="1600" dirty="0"/>
           </a:p>
@@ -3848,7 +4074,7 @@
                 <a:ea typeface="Calibri" pitchFamily="34" charset="-122"/>
                 <a:cs typeface="Calibri" pitchFamily="34" charset="-120"/>
               </a:rPr>
-              <a:t>EXEMPLO — TIPO E INSTÂNCIA</a:t>
+              <a:t>EXEMPLO EM JULIA — TIPO E INSTÂNCIA</a:t>
             </a:r>
             <a:endParaRPr lang="en-US" sz="1100" dirty="0"/>
           </a:p>
@@ -3919,7 +4145,7 @@
                 <a:ea typeface="Courier New" pitchFamily="34" charset="-122"/>
                 <a:cs typeface="Courier New" pitchFamily="34" charset="-120"/>
               </a:rPr>
-              <a:t>Carro</a:t>
+              <a:t>struct Carro</a:t>
             </a:r>
             <a:endParaRPr lang="en-US" sz="1500" dirty="0"/>
           </a:p>
@@ -4019,7 +4245,7 @@
                 <a:ea typeface="Courier New" pitchFamily="34" charset="-122"/>
                 <a:cs typeface="Courier New" pitchFamily="34" charset="-120"/>
               </a:rPr>
-              <a:t>fim</a:t>
+              <a:t>end</a:t>
             </a:r>
             <a:endParaRPr lang="en-US" sz="1500" dirty="0"/>
           </a:p>
@@ -4169,6 +4395,783 @@
 </file>
 
 <file path=ppt/slides/slide5.xml><?xml version="1.0" encoding="utf-8"?>
+<p:sld xmlns:a="http://schemas.openxmlformats.org/drawingml/2006/main" xmlns:r="http://schemas.openxmlformats.org/officeDocument/2006/relationships" xmlns:p="http://schemas.openxmlformats.org/presentationml/2006/main">
+  <p:cSld name="Slide 2">
+    <p:bg>
+      <p:bgPr>
+        <a:solidFill>
+          <a:srgbClr val="FFFFFF"/>
+        </a:solidFill>
+      </p:bgPr>
+    </p:bg>
+    <p:spTree>
+      <p:nvGrpSpPr>
+        <p:cNvPr id="1" name=""/>
+        <p:cNvGrpSpPr/>
+        <p:nvPr/>
+      </p:nvGrpSpPr>
+      <p:grpSpPr>
+        <a:xfrm>
+          <a:off x="0" y="0"/>
+          <a:ext cx="0" cy="0"/>
+          <a:chOff x="0" y="0"/>
+          <a:chExt cx="0" cy="0"/>
+        </a:xfrm>
+      </p:grpSpPr>
+      <p:sp>
+        <p:nvSpPr>
+          <p:cNvPr id="2" name="Text 0"/>
+          <p:cNvSpPr/>
+          <p:nvPr/>
+        </p:nvSpPr>
+        <p:spPr>
+          <a:xfrm>
+            <a:off x="502920" y="320040"/>
+            <a:ext cx="11185855" cy="365760"/>
+          </a:xfrm>
+          <a:prstGeom prst="rect">
+            <a:avLst/>
+          </a:prstGeom>
+          <a:noFill/>
+          <a:ln/>
+        </p:spPr>
+        <p:txBody>
+          <a:bodyPr wrap="square" rtlCol="0" anchor="ctr"/>
+          <a:lstStyle/>
+          <a:p>
+            <a:pPr indent="0" marL="0">
+              <a:buNone/>
+            </a:pPr>
+            <a:r>
+              <a:rPr lang="en-US" sz="1300" b="1" spc="200" kern="0" dirty="0">
+                <a:solidFill>
+                  <a:srgbClr val="B5651D"/>
+                </a:solidFill>
+                <a:latin typeface="Calibri" pitchFamily="34" charset="0"/>
+                <a:ea typeface="Calibri" pitchFamily="34" charset="-122"/>
+                <a:cs typeface="Calibri" pitchFamily="34" charset="-120"/>
+              </a:rPr>
+              <a:t>AULA 11  ·  Exemplo — Tipo e Instância</a:t>
+            </a:r>
+            <a:endParaRPr lang="en-US" sz="1300" dirty="0"/>
+          </a:p>
+        </p:txBody>
+      </p:sp>
+      <p:sp>
+        <p:nvSpPr>
+          <p:cNvPr id="3" name="Text 1"/>
+          <p:cNvSpPr/>
+          <p:nvPr/>
+        </p:nvSpPr>
+        <p:spPr>
+          <a:xfrm>
+            <a:off x="502920" y="658368"/>
+            <a:ext cx="11185855" cy="502920"/>
+          </a:xfrm>
+          <a:prstGeom prst="rect">
+            <a:avLst/>
+          </a:prstGeom>
+          <a:noFill/>
+          <a:ln/>
+        </p:spPr>
+        <p:txBody>
+          <a:bodyPr wrap="square" rtlCol="0" anchor="ctr"/>
+          <a:lstStyle/>
+          <a:p>
+            <a:pPr indent="0" marL="0">
+              <a:buNone/>
+            </a:pPr>
+            <a:r>
+              <a:rPr lang="en-US" sz="1900" b="1" dirty="0">
+                <a:solidFill>
+                  <a:srgbClr val="1B3A5C"/>
+                </a:solidFill>
+                <a:latin typeface="Calibri" pitchFamily="34" charset="0"/>
+                <a:ea typeface="Calibri" pitchFamily="34" charset="-122"/>
+                <a:cs typeface="Calibri" pitchFamily="34" charset="-120"/>
+              </a:rPr>
+              <a:t>Como criar uma instância de um novo tipo?</a:t>
+            </a:r>
+            <a:endParaRPr lang="en-US" sz="1900" dirty="0"/>
+          </a:p>
+        </p:txBody>
+      </p:sp>
+      <p:sp>
+        <p:nvSpPr>
+          <p:cNvPr id="4" name="Shape 2"/>
+          <p:cNvSpPr/>
+          <p:nvPr/>
+        </p:nvSpPr>
+        <p:spPr>
+          <a:xfrm>
+            <a:off x="502920" y="1298448"/>
+            <a:ext cx="11185855" cy="2148840"/>
+          </a:xfrm>
+          <a:prstGeom prst="rect">
+            <a:avLst/>
+          </a:prstGeom>
+          <a:solidFill>
+            <a:srgbClr val="F2F4F7"/>
+          </a:solidFill>
+          <a:ln w="9525">
+            <a:solidFill>
+              <a:srgbClr val="C7CFDA"/>
+            </a:solidFill>
+            <a:prstDash val="solid"/>
+          </a:ln>
+        </p:spPr>
+      </p:sp>
+      <p:sp>
+        <p:nvSpPr>
+          <p:cNvPr id="5" name="Shape 3"/>
+          <p:cNvSpPr/>
+          <p:nvPr/>
+        </p:nvSpPr>
+        <p:spPr>
+          <a:xfrm>
+            <a:off x="502920" y="1298448"/>
+            <a:ext cx="54864" cy="2148840"/>
+          </a:xfrm>
+          <a:prstGeom prst="rect">
+            <a:avLst/>
+          </a:prstGeom>
+          <a:solidFill>
+            <a:srgbClr val="2C7A8C"/>
+          </a:solidFill>
+          <a:ln/>
+        </p:spPr>
+      </p:sp>
+      <p:sp>
+        <p:nvSpPr>
+          <p:cNvPr id="6" name="Text 4"/>
+          <p:cNvSpPr/>
+          <p:nvPr/>
+        </p:nvSpPr>
+        <p:spPr>
+          <a:xfrm>
+            <a:off x="731520" y="1371600"/>
+            <a:ext cx="10728655" cy="2002536"/>
+          </a:xfrm>
+          <a:prstGeom prst="rect">
+            <a:avLst/>
+          </a:prstGeom>
+          <a:noFill/>
+          <a:ln/>
+        </p:spPr>
+        <p:txBody>
+          <a:bodyPr wrap="square" rtlCol="0" anchor="t"/>
+          <a:lstStyle/>
+          <a:p>
+            <a:pPr indent="0" marL="0">
+              <a:lnSpc>
+                <a:spcPct val="115000"/>
+              </a:lnSpc>
+              <a:buNone/>
+            </a:pPr>
+            <a:r>
+              <a:rPr lang="en-US" sz="1200" dirty="0">
+                <a:solidFill>
+                  <a:srgbClr val="1A1A1A"/>
+                </a:solidFill>
+                <a:latin typeface="Consolas" pitchFamily="34" charset="0"/>
+                <a:ea typeface="Consolas" pitchFamily="34" charset="-122"/>
+                <a:cs typeface="Consolas" pitchFamily="34" charset="-120"/>
+              </a:rPr>
+              <a:t>struct Carro</a:t>
+            </a:r>
+            <a:endParaRPr lang="en-US" sz="1200" dirty="0"/>
+          </a:p>
+          <a:p>
+            <a:pPr indent="0" marL="0">
+              <a:lnSpc>
+                <a:spcPct val="115000"/>
+              </a:lnSpc>
+              <a:buNone/>
+            </a:pPr>
+            <a:r>
+              <a:rPr lang="en-US" sz="1200" dirty="0">
+                <a:solidFill>
+                  <a:srgbClr val="1A1A1A"/>
+                </a:solidFill>
+                <a:latin typeface="Consolas" pitchFamily="34" charset="0"/>
+                <a:ea typeface="Consolas" pitchFamily="34" charset="-122"/>
+                <a:cs typeface="Consolas" pitchFamily="34" charset="-120"/>
+              </a:rPr>
+              <a:t>    marca::String</a:t>
+            </a:r>
+            <a:endParaRPr lang="en-US" sz="1200" dirty="0"/>
+          </a:p>
+          <a:p>
+            <a:pPr indent="0" marL="0">
+              <a:lnSpc>
+                <a:spcPct val="115000"/>
+              </a:lnSpc>
+              <a:buNone/>
+            </a:pPr>
+            <a:r>
+              <a:rPr lang="en-US" sz="1200" dirty="0">
+                <a:solidFill>
+                  <a:srgbClr val="1A1A1A"/>
+                </a:solidFill>
+                <a:latin typeface="Consolas" pitchFamily="34" charset="0"/>
+                <a:ea typeface="Consolas" pitchFamily="34" charset="-122"/>
+                <a:cs typeface="Consolas" pitchFamily="34" charset="-120"/>
+              </a:rPr>
+              <a:t>    modelo::String</a:t>
+            </a:r>
+            <a:endParaRPr lang="en-US" sz="1200" dirty="0"/>
+          </a:p>
+          <a:p>
+            <a:pPr indent="0" marL="0">
+              <a:lnSpc>
+                <a:spcPct val="115000"/>
+              </a:lnSpc>
+              <a:buNone/>
+            </a:pPr>
+            <a:r>
+              <a:rPr lang="en-US" sz="1200" dirty="0">
+                <a:solidFill>
+                  <a:srgbClr val="1A1A1A"/>
+                </a:solidFill>
+                <a:latin typeface="Consolas" pitchFamily="34" charset="0"/>
+                <a:ea typeface="Consolas" pitchFamily="34" charset="-122"/>
+                <a:cs typeface="Consolas" pitchFamily="34" charset="-120"/>
+              </a:rPr>
+              <a:t>    ano::Int</a:t>
+            </a:r>
+            <a:endParaRPr lang="en-US" sz="1200" dirty="0"/>
+          </a:p>
+          <a:p>
+            <a:pPr indent="0" marL="0">
+              <a:lnSpc>
+                <a:spcPct val="115000"/>
+              </a:lnSpc>
+              <a:buNone/>
+            </a:pPr>
+            <a:r>
+              <a:rPr lang="en-US" sz="1200" dirty="0">
+                <a:solidFill>
+                  <a:srgbClr val="1A1A1A"/>
+                </a:solidFill>
+                <a:latin typeface="Consolas" pitchFamily="34" charset="0"/>
+                <a:ea typeface="Consolas" pitchFamily="34" charset="-122"/>
+                <a:cs typeface="Consolas" pitchFamily="34" charset="-120"/>
+              </a:rPr>
+              <a:t>    velocidade::Float64</a:t>
+            </a:r>
+            <a:endParaRPr lang="en-US" sz="1200" dirty="0"/>
+          </a:p>
+          <a:p>
+            <a:pPr indent="0" marL="0">
+              <a:lnSpc>
+                <a:spcPct val="115000"/>
+              </a:lnSpc>
+              <a:buNone/>
+            </a:pPr>
+            <a:r>
+              <a:rPr lang="en-US" sz="1200" dirty="0">
+                <a:solidFill>
+                  <a:srgbClr val="1A1A1A"/>
+                </a:solidFill>
+                <a:latin typeface="Consolas" pitchFamily="34" charset="0"/>
+                <a:ea typeface="Consolas" pitchFamily="34" charset="-122"/>
+                <a:cs typeface="Consolas" pitchFamily="34" charset="-120"/>
+              </a:rPr>
+              <a:t>end</a:t>
+            </a:r>
+            <a:endParaRPr lang="en-US" sz="1200" dirty="0"/>
+          </a:p>
+          <a:p>
+            <a:pPr indent="0" marL="0">
+              <a:lnSpc>
+                <a:spcPct val="115000"/>
+              </a:lnSpc>
+              <a:buNone/>
+            </a:pPr>
+            <a:endParaRPr lang="en-US" sz="1200" dirty="0"/>
+          </a:p>
+          <a:p>
+            <a:pPr indent="0" marL="0">
+              <a:lnSpc>
+                <a:spcPct val="115000"/>
+              </a:lnSpc>
+              <a:buNone/>
+            </a:pPr>
+            <a:r>
+              <a:rPr lang="en-US" sz="1200" dirty="0">
+                <a:solidFill>
+                  <a:srgbClr val="1A1A1A"/>
+                </a:solidFill>
+                <a:latin typeface="Consolas" pitchFamily="34" charset="0"/>
+                <a:ea typeface="Consolas" pitchFamily="34" charset="-122"/>
+                <a:cs typeface="Consolas" pitchFamily="34" charset="-120"/>
+              </a:rPr>
+              <a:t>meu_carro = Carro("Toyota", "Corolla", 2023, 0.0)</a:t>
+            </a:r>
+            <a:endParaRPr lang="en-US" sz="1200" dirty="0"/>
+          </a:p>
+        </p:txBody>
+      </p:sp>
+      <p:sp>
+        <p:nvSpPr>
+          <p:cNvPr id="7" name="Shape 5"/>
+          <p:cNvSpPr/>
+          <p:nvPr/>
+        </p:nvSpPr>
+        <p:spPr>
+          <a:xfrm>
+            <a:off x="502920" y="3611880"/>
+            <a:ext cx="11185855" cy="2926080"/>
+          </a:xfrm>
+          <a:prstGeom prst="rect">
+            <a:avLst/>
+          </a:prstGeom>
+          <a:solidFill>
+            <a:srgbClr val="EFF5F1"/>
+          </a:solidFill>
+          <a:ln w="9525">
+            <a:solidFill>
+              <a:srgbClr val="C7CFDA"/>
+            </a:solidFill>
+            <a:prstDash val="solid"/>
+          </a:ln>
+        </p:spPr>
+      </p:sp>
+      <p:sp>
+        <p:nvSpPr>
+          <p:cNvPr id="8" name="Shape 6"/>
+          <p:cNvSpPr/>
+          <p:nvPr/>
+        </p:nvSpPr>
+        <p:spPr>
+          <a:xfrm>
+            <a:off x="502920" y="3611880"/>
+            <a:ext cx="54864" cy="2926080"/>
+          </a:xfrm>
+          <a:prstGeom prst="rect">
+            <a:avLst/>
+          </a:prstGeom>
+          <a:solidFill>
+            <a:srgbClr val="2C7A8C"/>
+          </a:solidFill>
+          <a:ln/>
+        </p:spPr>
+      </p:sp>
+      <p:sp>
+        <p:nvSpPr>
+          <p:cNvPr id="9" name="Text 7"/>
+          <p:cNvSpPr/>
+          <p:nvPr/>
+        </p:nvSpPr>
+        <p:spPr>
+          <a:xfrm>
+            <a:off x="731520" y="3703320"/>
+            <a:ext cx="10728655" cy="2743200"/>
+          </a:xfrm>
+          <a:prstGeom prst="rect">
+            <a:avLst/>
+          </a:prstGeom>
+          <a:noFill/>
+          <a:ln/>
+        </p:spPr>
+        <p:txBody>
+          <a:bodyPr wrap="square" rtlCol="0" anchor="t"/>
+          <a:lstStyle/>
+          <a:p>
+            <a:pPr indent="0" marL="0">
+              <a:lnSpc>
+                <a:spcPct val="112000"/>
+              </a:lnSpc>
+              <a:buNone/>
+            </a:pPr>
+            <a:r>
+              <a:rPr lang="en-US" sz="1300" b="1" dirty="0">
+                <a:solidFill>
+                  <a:srgbClr val="1B3A5C"/>
+                </a:solidFill>
+                <a:latin typeface="Consolas" pitchFamily="34" charset="0"/>
+                <a:ea typeface="Consolas" pitchFamily="34" charset="-122"/>
+                <a:cs typeface="Consolas" pitchFamily="34" charset="-120"/>
+              </a:rPr>
+              <a:t>Carro(...)</a:t>
+            </a:r>
+            <a:pPr indent="0" marL="0">
+              <a:lnSpc>
+                <a:spcPct val="112000"/>
+              </a:lnSpc>
+              <a:buNone/>
+            </a:pPr>
+            <a:r>
+              <a:rPr lang="en-US" sz="1300" dirty="0">
+                <a:solidFill>
+                  <a:srgbClr val="5B6B7A"/>
+                </a:solidFill>
+                <a:latin typeface="Consolas" pitchFamily="34" charset="0"/>
+                <a:ea typeface="Consolas" pitchFamily="34" charset="-122"/>
+                <a:cs typeface="Consolas" pitchFamily="34" charset="-120"/>
+              </a:rPr>
+              <a:t>  →  </a:t>
+            </a:r>
+            <a:pPr indent="0" marL="0">
+              <a:lnSpc>
+                <a:spcPct val="112000"/>
+              </a:lnSpc>
+              <a:buNone/>
+            </a:pPr>
+            <a:r>
+              <a:rPr lang="en-US" sz="1300" dirty="0">
+                <a:solidFill>
+                  <a:srgbClr val="1A1A1A"/>
+                </a:solidFill>
+                <a:latin typeface="Consolas" pitchFamily="34" charset="0"/>
+                <a:ea typeface="Consolas" pitchFamily="34" charset="-122"/>
+                <a:cs typeface="Consolas" pitchFamily="34" charset="-120"/>
+              </a:rPr>
+              <a:t>chama o construtor do tipo Carro, associando cada argumento posicional ao campo correspondente:</a:t>
+            </a:r>
+            <a:pPr indent="0" marL="0">
+              <a:lnSpc>
+                <a:spcPct val="112000"/>
+              </a:lnSpc>
+              <a:buNone/>
+            </a:pPr>
+            <a:r>
+              <a:rPr lang="en-US" sz="1300" dirty="0">
+                <a:solidFill>
+                  <a:srgbClr val="000000"/>
+                </a:solidFill>
+              </a:rPr>
+              <a:t>
+</a:t>
+            </a:r>
+            <a:pPr indent="0" marL="0">
+              <a:lnSpc>
+                <a:spcPct val="112000"/>
+              </a:lnSpc>
+              <a:buNone/>
+            </a:pPr>
+            <a:r>
+              <a:rPr lang="en-US" sz="1300" b="1" dirty="0">
+                <a:solidFill>
+                  <a:srgbClr val="1B3A5C"/>
+                </a:solidFill>
+                <a:latin typeface="Consolas" pitchFamily="34" charset="0"/>
+                <a:ea typeface="Consolas" pitchFamily="34" charset="-122"/>
+                <a:cs typeface="Consolas" pitchFamily="34" charset="-120"/>
+              </a:rPr>
+              <a:t>marca</a:t>
+            </a:r>
+            <a:pPr indent="0" marL="0">
+              <a:lnSpc>
+                <a:spcPct val="112000"/>
+              </a:lnSpc>
+              <a:buNone/>
+            </a:pPr>
+            <a:r>
+              <a:rPr lang="en-US" sz="1300" dirty="0">
+                <a:solidFill>
+                  <a:srgbClr val="5B6B7A"/>
+                </a:solidFill>
+                <a:latin typeface="Consolas" pitchFamily="34" charset="0"/>
+                <a:ea typeface="Consolas" pitchFamily="34" charset="-122"/>
+                <a:cs typeface="Consolas" pitchFamily="34" charset="-120"/>
+              </a:rPr>
+              <a:t>  →  </a:t>
+            </a:r>
+            <a:pPr indent="0" marL="0">
+              <a:lnSpc>
+                <a:spcPct val="112000"/>
+              </a:lnSpc>
+              <a:buNone/>
+            </a:pPr>
+            <a:r>
+              <a:rPr lang="en-US" sz="1300" dirty="0">
+                <a:solidFill>
+                  <a:srgbClr val="1A1A1A"/>
+                </a:solidFill>
+                <a:latin typeface="Consolas" pitchFamily="34" charset="0"/>
+                <a:ea typeface="Consolas" pitchFamily="34" charset="-122"/>
+                <a:cs typeface="Consolas" pitchFamily="34" charset="-120"/>
+              </a:rPr>
+              <a:t>"Toyota"</a:t>
+            </a:r>
+            <a:pPr indent="0" marL="0">
+              <a:lnSpc>
+                <a:spcPct val="112000"/>
+              </a:lnSpc>
+              <a:buNone/>
+            </a:pPr>
+            <a:r>
+              <a:rPr lang="en-US" sz="1300" dirty="0">
+                <a:solidFill>
+                  <a:srgbClr val="000000"/>
+                </a:solidFill>
+              </a:rPr>
+              <a:t>
+</a:t>
+            </a:r>
+            <a:pPr indent="0" marL="0">
+              <a:lnSpc>
+                <a:spcPct val="112000"/>
+              </a:lnSpc>
+              <a:buNone/>
+            </a:pPr>
+            <a:r>
+              <a:rPr lang="en-US" sz="1300" b="1" dirty="0">
+                <a:solidFill>
+                  <a:srgbClr val="1B3A5C"/>
+                </a:solidFill>
+                <a:latin typeface="Consolas" pitchFamily="34" charset="0"/>
+                <a:ea typeface="Consolas" pitchFamily="34" charset="-122"/>
+                <a:cs typeface="Consolas" pitchFamily="34" charset="-120"/>
+              </a:rPr>
+              <a:t>modelo</a:t>
+            </a:r>
+            <a:pPr indent="0" marL="0">
+              <a:lnSpc>
+                <a:spcPct val="112000"/>
+              </a:lnSpc>
+              <a:buNone/>
+            </a:pPr>
+            <a:r>
+              <a:rPr lang="en-US" sz="1300" dirty="0">
+                <a:solidFill>
+                  <a:srgbClr val="5B6B7A"/>
+                </a:solidFill>
+                <a:latin typeface="Consolas" pitchFamily="34" charset="0"/>
+                <a:ea typeface="Consolas" pitchFamily="34" charset="-122"/>
+                <a:cs typeface="Consolas" pitchFamily="34" charset="-120"/>
+              </a:rPr>
+              <a:t>  →  </a:t>
+            </a:r>
+            <a:pPr indent="0" marL="0">
+              <a:lnSpc>
+                <a:spcPct val="112000"/>
+              </a:lnSpc>
+              <a:buNone/>
+            </a:pPr>
+            <a:r>
+              <a:rPr lang="en-US" sz="1300" dirty="0">
+                <a:solidFill>
+                  <a:srgbClr val="1A1A1A"/>
+                </a:solidFill>
+                <a:latin typeface="Consolas" pitchFamily="34" charset="0"/>
+                <a:ea typeface="Consolas" pitchFamily="34" charset="-122"/>
+                <a:cs typeface="Consolas" pitchFamily="34" charset="-120"/>
+              </a:rPr>
+              <a:t>"Corolla"</a:t>
+            </a:r>
+            <a:pPr indent="0" marL="0">
+              <a:lnSpc>
+                <a:spcPct val="112000"/>
+              </a:lnSpc>
+              <a:buNone/>
+            </a:pPr>
+            <a:r>
+              <a:rPr lang="en-US" sz="1300" dirty="0">
+                <a:solidFill>
+                  <a:srgbClr val="000000"/>
+                </a:solidFill>
+              </a:rPr>
+              <a:t>
+</a:t>
+            </a:r>
+            <a:pPr indent="0" marL="0">
+              <a:lnSpc>
+                <a:spcPct val="112000"/>
+              </a:lnSpc>
+              <a:buNone/>
+            </a:pPr>
+            <a:r>
+              <a:rPr lang="en-US" sz="1300" b="1" dirty="0">
+                <a:solidFill>
+                  <a:srgbClr val="1B3A5C"/>
+                </a:solidFill>
+                <a:latin typeface="Consolas" pitchFamily="34" charset="0"/>
+                <a:ea typeface="Consolas" pitchFamily="34" charset="-122"/>
+                <a:cs typeface="Consolas" pitchFamily="34" charset="-120"/>
+              </a:rPr>
+              <a:t>ano</a:t>
+            </a:r>
+            <a:pPr indent="0" marL="0">
+              <a:lnSpc>
+                <a:spcPct val="112000"/>
+              </a:lnSpc>
+              <a:buNone/>
+            </a:pPr>
+            <a:r>
+              <a:rPr lang="en-US" sz="1300" dirty="0">
+                <a:solidFill>
+                  <a:srgbClr val="5B6B7A"/>
+                </a:solidFill>
+                <a:latin typeface="Consolas" pitchFamily="34" charset="0"/>
+                <a:ea typeface="Consolas" pitchFamily="34" charset="-122"/>
+                <a:cs typeface="Consolas" pitchFamily="34" charset="-120"/>
+              </a:rPr>
+              <a:t>  →  </a:t>
+            </a:r>
+            <a:pPr indent="0" marL="0">
+              <a:lnSpc>
+                <a:spcPct val="112000"/>
+              </a:lnSpc>
+              <a:buNone/>
+            </a:pPr>
+            <a:r>
+              <a:rPr lang="en-US" sz="1300" dirty="0">
+                <a:solidFill>
+                  <a:srgbClr val="1A1A1A"/>
+                </a:solidFill>
+                <a:latin typeface="Consolas" pitchFamily="34" charset="0"/>
+                <a:ea typeface="Consolas" pitchFamily="34" charset="-122"/>
+                <a:cs typeface="Consolas" pitchFamily="34" charset="-120"/>
+              </a:rPr>
+              <a:t>2023</a:t>
+            </a:r>
+            <a:pPr indent="0" marL="0">
+              <a:lnSpc>
+                <a:spcPct val="112000"/>
+              </a:lnSpc>
+              <a:buNone/>
+            </a:pPr>
+            <a:r>
+              <a:rPr lang="en-US" sz="1300" dirty="0">
+                <a:solidFill>
+                  <a:srgbClr val="000000"/>
+                </a:solidFill>
+              </a:rPr>
+              <a:t>
+</a:t>
+            </a:r>
+            <a:pPr indent="0" marL="0">
+              <a:lnSpc>
+                <a:spcPct val="112000"/>
+              </a:lnSpc>
+              <a:buNone/>
+            </a:pPr>
+            <a:r>
+              <a:rPr lang="en-US" sz="1300" b="1" dirty="0">
+                <a:solidFill>
+                  <a:srgbClr val="1B3A5C"/>
+                </a:solidFill>
+                <a:latin typeface="Consolas" pitchFamily="34" charset="0"/>
+                <a:ea typeface="Consolas" pitchFamily="34" charset="-122"/>
+                <a:cs typeface="Consolas" pitchFamily="34" charset="-120"/>
+              </a:rPr>
+              <a:t>velocidade</a:t>
+            </a:r>
+            <a:pPr indent="0" marL="0">
+              <a:lnSpc>
+                <a:spcPct val="112000"/>
+              </a:lnSpc>
+              <a:buNone/>
+            </a:pPr>
+            <a:r>
+              <a:rPr lang="en-US" sz="1300" dirty="0">
+                <a:solidFill>
+                  <a:srgbClr val="5B6B7A"/>
+                </a:solidFill>
+                <a:latin typeface="Consolas" pitchFamily="34" charset="0"/>
+                <a:ea typeface="Consolas" pitchFamily="34" charset="-122"/>
+                <a:cs typeface="Consolas" pitchFamily="34" charset="-120"/>
+              </a:rPr>
+              <a:t>  →  </a:t>
+            </a:r>
+            <a:pPr indent="0" marL="0">
+              <a:lnSpc>
+                <a:spcPct val="112000"/>
+              </a:lnSpc>
+              <a:buNone/>
+            </a:pPr>
+            <a:r>
+              <a:rPr lang="en-US" sz="1300" dirty="0">
+                <a:solidFill>
+                  <a:srgbClr val="1A1A1A"/>
+                </a:solidFill>
+                <a:latin typeface="Consolas" pitchFamily="34" charset="0"/>
+                <a:ea typeface="Consolas" pitchFamily="34" charset="-122"/>
+                <a:cs typeface="Consolas" pitchFamily="34" charset="-120"/>
+              </a:rPr>
+              <a:t>0.0</a:t>
+            </a:r>
+            <a:pPr indent="0" marL="0">
+              <a:lnSpc>
+                <a:spcPct val="112000"/>
+              </a:lnSpc>
+              <a:buNone/>
+            </a:pPr>
+            <a:r>
+              <a:rPr lang="en-US" sz="1300" dirty="0">
+                <a:solidFill>
+                  <a:srgbClr val="000000"/>
+                </a:solidFill>
+              </a:rPr>
+              <a:t>
+</a:t>
+            </a:r>
+            <a:pPr indent="0" marL="0">
+              <a:lnSpc>
+                <a:spcPct val="112000"/>
+              </a:lnSpc>
+              <a:buNone/>
+            </a:pPr>
+            <a:r>
+              <a:rPr lang="en-US" sz="1300" b="1" dirty="0">
+                <a:solidFill>
+                  <a:srgbClr val="1B3A5C"/>
+                </a:solidFill>
+                <a:latin typeface="Consolas" pitchFamily="34" charset="0"/>
+                <a:ea typeface="Consolas" pitchFamily="34" charset="-122"/>
+                <a:cs typeface="Consolas" pitchFamily="34" charset="-120"/>
+              </a:rPr>
+              <a:t>meu_carro</a:t>
+            </a:r>
+            <a:pPr indent="0" marL="0">
+              <a:lnSpc>
+                <a:spcPct val="112000"/>
+              </a:lnSpc>
+              <a:buNone/>
+            </a:pPr>
+            <a:r>
+              <a:rPr lang="en-US" sz="1300" dirty="0">
+                <a:solidFill>
+                  <a:srgbClr val="5B6B7A"/>
+                </a:solidFill>
+                <a:latin typeface="Consolas" pitchFamily="34" charset="0"/>
+                <a:ea typeface="Consolas" pitchFamily="34" charset="-122"/>
+                <a:cs typeface="Consolas" pitchFamily="34" charset="-120"/>
+              </a:rPr>
+              <a:t>  →  </a:t>
+            </a:r>
+            <a:pPr indent="0" marL="0">
+              <a:lnSpc>
+                <a:spcPct val="112000"/>
+              </a:lnSpc>
+              <a:buNone/>
+            </a:pPr>
+            <a:r>
+              <a:rPr lang="en-US" sz="1300" dirty="0">
+                <a:solidFill>
+                  <a:srgbClr val="1A1A1A"/>
+                </a:solidFill>
+                <a:latin typeface="Consolas" pitchFamily="34" charset="0"/>
+                <a:ea typeface="Consolas" pitchFamily="34" charset="-122"/>
+                <a:cs typeface="Consolas" pitchFamily="34" charset="-120"/>
+              </a:rPr>
+              <a:t>Carro("Toyota", "Corolla", 2023, 0.0)  (uma instância do tipo Carro)</a:t>
+            </a:r>
+            <a:endParaRPr lang="en-US" sz="1300" dirty="0"/>
+          </a:p>
+        </p:txBody>
+      </p:sp>
+    </p:spTree>
+  </p:cSld>
+  <p:clrMapOvr>
+    <a:masterClrMapping/>
+  </p:clrMapOvr>
+</p:sld>
+</file>
+
+<file path=ppt/slides/slide6.xml><?xml version="1.0" encoding="utf-8"?>
 <p:sld xmlns:a="http://schemas.openxmlformats.org/drawingml/2006/main" xmlns:r="http://schemas.openxmlformats.org/officeDocument/2006/relationships" xmlns:p="http://schemas.openxmlformats.org/presentationml/2006/main">
   <p:cSld name="Slide 5">
     <p:bg>
@@ -4981,7 +5984,7 @@
 </p:sld>
 </file>
 
-<file path=ppt/slides/slide6.xml><?xml version="1.0" encoding="utf-8"?>
+<file path=ppt/slides/slide7.xml><?xml version="1.0" encoding="utf-8"?>
 <p:sld xmlns:a="http://schemas.openxmlformats.org/drawingml/2006/main" xmlns:r="http://schemas.openxmlformats.org/officeDocument/2006/relationships" xmlns:p="http://schemas.openxmlformats.org/presentationml/2006/main">
   <p:cSld name="Slide 6">
     <p:bg>
@@ -5555,7 +6558,7 @@
                 <a:ea typeface="Calibri" pitchFamily="34" charset="-122"/>
                 <a:cs typeface="Calibri" pitchFamily="34" charset="-120"/>
               </a:rPr>
-              <a:t>EXEMPLO — CRIANDO E MODIFICANDO</a:t>
+              <a:t>EXEMPLO EM JULIA — CRIANDO E MODIFICANDO</a:t>
             </a:r>
             <a:endParaRPr lang="en-US" sz="1100" dirty="0"/>
           </a:p>
@@ -5626,7 +6629,7 @@
                 <a:ea typeface="Courier New" pitchFamily="34" charset="-122"/>
                 <a:cs typeface="Courier New" pitchFamily="34" charset="-120"/>
               </a:rPr>
-              <a:t>ContaBancaria</a:t>
+              <a:t>mutable struct ContaBancaria</a:t>
             </a:r>
             <a:endParaRPr lang="en-US" sz="1450" dirty="0"/>
           </a:p>
@@ -5646,7 +6649,7 @@
                 <a:ea typeface="Courier New" pitchFamily="34" charset="-122"/>
                 <a:cs typeface="Courier New" pitchFamily="34" charset="-120"/>
               </a:rPr>
-              <a:t>    titular::CadeiaDeCaractere</a:t>
+              <a:t>    titular::String</a:t>
             </a:r>
             <a:endParaRPr lang="en-US" sz="1450" dirty="0"/>
           </a:p>
@@ -5666,7 +6669,7 @@
                 <a:ea typeface="Courier New" pitchFamily="34" charset="-122"/>
                 <a:cs typeface="Courier New" pitchFamily="34" charset="-120"/>
               </a:rPr>
-              <a:t>    saldo::Número</a:t>
+              <a:t>    saldo::Float64</a:t>
             </a:r>
             <a:endParaRPr lang="en-US" sz="1450" dirty="0"/>
           </a:p>
@@ -5686,7 +6689,7 @@
                 <a:ea typeface="Courier New" pitchFamily="34" charset="-122"/>
                 <a:cs typeface="Courier New" pitchFamily="34" charset="-120"/>
               </a:rPr>
-              <a:t>    ativa::VerdadeiroOuFalso</a:t>
+              <a:t>    ativa::Bool</a:t>
             </a:r>
             <a:endParaRPr lang="en-US" sz="1450" dirty="0"/>
           </a:p>
@@ -5706,7 +6709,7 @@
                 <a:ea typeface="Courier New" pitchFamily="34" charset="-122"/>
                 <a:cs typeface="Courier New" pitchFamily="34" charset="-120"/>
               </a:rPr>
-              <a:t>fim</a:t>
+              <a:t>end</a:t>
             </a:r>
             <a:endParaRPr lang="en-US" sz="1450" dirty="0"/>
           </a:p>
@@ -5763,7 +6766,7 @@
                 <a:ea typeface="Courier New" pitchFamily="34" charset="-122"/>
                 <a:cs typeface="Courier New" pitchFamily="34" charset="-120"/>
               </a:rPr>
-              <a:t> = ContaBancaria("Maria Silva", 1000.0, verdadeiro)</a:t>
+              <a:t> = ContaBancaria("Maria Silva", 1000.0, true)</a:t>
             </a:r>
             <a:endParaRPr lang="en-US" sz="1450" dirty="0"/>
           </a:p>
@@ -5877,7 +6880,7 @@
                 <a:ea typeface="Courier New" pitchFamily="34" charset="-122"/>
                 <a:cs typeface="Courier New" pitchFamily="34" charset="-120"/>
               </a:rPr>
-              <a:t> = falso</a:t>
+              <a:t> = false</a:t>
             </a:r>
             <a:endParaRPr lang="en-US" sz="1450" dirty="0"/>
           </a:p>
@@ -5969,7 +6972,899 @@
 </p:sld>
 </file>
 
-<file path=ppt/slides/slide7.xml><?xml version="1.0" encoding="utf-8"?>
+<file path=ppt/slides/slide8.xml><?xml version="1.0" encoding="utf-8"?>
+<p:sld xmlns:a="http://schemas.openxmlformats.org/drawingml/2006/main" xmlns:r="http://schemas.openxmlformats.org/officeDocument/2006/relationships" xmlns:p="http://schemas.openxmlformats.org/presentationml/2006/main">
+  <p:cSld name="Slide 3">
+    <p:bg>
+      <p:bgPr>
+        <a:solidFill>
+          <a:srgbClr val="FFFFFF"/>
+        </a:solidFill>
+      </p:bgPr>
+    </p:bg>
+    <p:spTree>
+      <p:nvGrpSpPr>
+        <p:cNvPr id="1" name=""/>
+        <p:cNvGrpSpPr/>
+        <p:nvPr/>
+      </p:nvGrpSpPr>
+      <p:grpSpPr>
+        <a:xfrm>
+          <a:off x="0" y="0"/>
+          <a:ext cx="0" cy="0"/>
+          <a:chOff x="0" y="0"/>
+          <a:chExt cx="0" cy="0"/>
+        </a:xfrm>
+      </p:grpSpPr>
+      <p:sp>
+        <p:nvSpPr>
+          <p:cNvPr id="2" name="Text 0"/>
+          <p:cNvSpPr/>
+          <p:nvPr/>
+        </p:nvSpPr>
+        <p:spPr>
+          <a:xfrm>
+            <a:off x="502920" y="320040"/>
+            <a:ext cx="11185855" cy="365760"/>
+          </a:xfrm>
+          <a:prstGeom prst="rect">
+            <a:avLst/>
+          </a:prstGeom>
+          <a:noFill/>
+          <a:ln/>
+        </p:spPr>
+        <p:txBody>
+          <a:bodyPr wrap="square" rtlCol="0" anchor="ctr"/>
+          <a:lstStyle/>
+          <a:p>
+            <a:pPr indent="0" marL="0">
+              <a:buNone/>
+            </a:pPr>
+            <a:r>
+              <a:rPr lang="en-US" sz="1300" b="1" spc="200" kern="0" dirty="0">
+                <a:solidFill>
+                  <a:srgbClr val="B5651D"/>
+                </a:solidFill>
+                <a:latin typeface="Calibri" pitchFamily="34" charset="0"/>
+                <a:ea typeface="Calibri" pitchFamily="34" charset="-122"/>
+                <a:cs typeface="Calibri" pitchFamily="34" charset="-120"/>
+              </a:rPr>
+              <a:t>AULA 11  ·  Exemplo — Criando e Modificando</a:t>
+            </a:r>
+            <a:endParaRPr lang="en-US" sz="1300" dirty="0"/>
+          </a:p>
+        </p:txBody>
+      </p:sp>
+      <p:sp>
+        <p:nvSpPr>
+          <p:cNvPr id="3" name="Text 1"/>
+          <p:cNvSpPr/>
+          <p:nvPr/>
+        </p:nvSpPr>
+        <p:spPr>
+          <a:xfrm>
+            <a:off x="502920" y="658368"/>
+            <a:ext cx="11185855" cy="502920"/>
+          </a:xfrm>
+          <a:prstGeom prst="rect">
+            <a:avLst/>
+          </a:prstGeom>
+          <a:noFill/>
+          <a:ln/>
+        </p:spPr>
+        <p:txBody>
+          <a:bodyPr wrap="square" rtlCol="0" anchor="ctr"/>
+          <a:lstStyle/>
+          <a:p>
+            <a:pPr indent="0" marL="0">
+              <a:buNone/>
+            </a:pPr>
+            <a:r>
+              <a:rPr lang="en-US" sz="1900" b="1" dirty="0">
+                <a:solidFill>
+                  <a:srgbClr val="1B3A5C"/>
+                </a:solidFill>
+                <a:latin typeface="Calibri" pitchFamily="34" charset="0"/>
+                <a:ea typeface="Calibri" pitchFamily="34" charset="-122"/>
+                <a:cs typeface="Calibri" pitchFamily="34" charset="-120"/>
+              </a:rPr>
+              <a:t>Como criar e depois modificar uma instância mutável?</a:t>
+            </a:r>
+            <a:endParaRPr lang="en-US" sz="1900" dirty="0"/>
+          </a:p>
+        </p:txBody>
+      </p:sp>
+      <p:sp>
+        <p:nvSpPr>
+          <p:cNvPr id="4" name="Shape 2"/>
+          <p:cNvSpPr/>
+          <p:nvPr/>
+        </p:nvSpPr>
+        <p:spPr>
+          <a:xfrm>
+            <a:off x="502920" y="1298448"/>
+            <a:ext cx="11185855" cy="2331720"/>
+          </a:xfrm>
+          <a:prstGeom prst="rect">
+            <a:avLst/>
+          </a:prstGeom>
+          <a:solidFill>
+            <a:srgbClr val="F2F4F7"/>
+          </a:solidFill>
+          <a:ln w="9525">
+            <a:solidFill>
+              <a:srgbClr val="C7CFDA"/>
+            </a:solidFill>
+            <a:prstDash val="solid"/>
+          </a:ln>
+        </p:spPr>
+      </p:sp>
+      <p:sp>
+        <p:nvSpPr>
+          <p:cNvPr id="5" name="Shape 3"/>
+          <p:cNvSpPr/>
+          <p:nvPr/>
+        </p:nvSpPr>
+        <p:spPr>
+          <a:xfrm>
+            <a:off x="502920" y="1298448"/>
+            <a:ext cx="54864" cy="2331720"/>
+          </a:xfrm>
+          <a:prstGeom prst="rect">
+            <a:avLst/>
+          </a:prstGeom>
+          <a:solidFill>
+            <a:srgbClr val="2C7A8C"/>
+          </a:solidFill>
+          <a:ln/>
+        </p:spPr>
+      </p:sp>
+      <p:sp>
+        <p:nvSpPr>
+          <p:cNvPr id="6" name="Text 4"/>
+          <p:cNvSpPr/>
+          <p:nvPr/>
+        </p:nvSpPr>
+        <p:spPr>
+          <a:xfrm>
+            <a:off x="731520" y="1371600"/>
+            <a:ext cx="10728655" cy="2185416"/>
+          </a:xfrm>
+          <a:prstGeom prst="rect">
+            <a:avLst/>
+          </a:prstGeom>
+          <a:noFill/>
+          <a:ln/>
+        </p:spPr>
+        <p:txBody>
+          <a:bodyPr wrap="square" rtlCol="0" anchor="t"/>
+          <a:lstStyle/>
+          <a:p>
+            <a:pPr indent="0" marL="0">
+              <a:lnSpc>
+                <a:spcPct val="115000"/>
+              </a:lnSpc>
+              <a:buNone/>
+            </a:pPr>
+            <a:r>
+              <a:rPr lang="en-US" sz="1100" dirty="0">
+                <a:solidFill>
+                  <a:srgbClr val="1A1A1A"/>
+                </a:solidFill>
+                <a:latin typeface="Consolas" pitchFamily="34" charset="0"/>
+                <a:ea typeface="Consolas" pitchFamily="34" charset="-122"/>
+                <a:cs typeface="Consolas" pitchFamily="34" charset="-120"/>
+              </a:rPr>
+              <a:t>mutable struct ContaBancaria</a:t>
+            </a:r>
+            <a:endParaRPr lang="en-US" sz="1100" dirty="0"/>
+          </a:p>
+          <a:p>
+            <a:pPr indent="0" marL="0">
+              <a:lnSpc>
+                <a:spcPct val="115000"/>
+              </a:lnSpc>
+              <a:buNone/>
+            </a:pPr>
+            <a:r>
+              <a:rPr lang="en-US" sz="1100" dirty="0">
+                <a:solidFill>
+                  <a:srgbClr val="1A1A1A"/>
+                </a:solidFill>
+                <a:latin typeface="Consolas" pitchFamily="34" charset="0"/>
+                <a:ea typeface="Consolas" pitchFamily="34" charset="-122"/>
+                <a:cs typeface="Consolas" pitchFamily="34" charset="-120"/>
+              </a:rPr>
+              <a:t>    titular::String</a:t>
+            </a:r>
+            <a:endParaRPr lang="en-US" sz="1100" dirty="0"/>
+          </a:p>
+          <a:p>
+            <a:pPr indent="0" marL="0">
+              <a:lnSpc>
+                <a:spcPct val="115000"/>
+              </a:lnSpc>
+              <a:buNone/>
+            </a:pPr>
+            <a:r>
+              <a:rPr lang="en-US" sz="1100" dirty="0">
+                <a:solidFill>
+                  <a:srgbClr val="1A1A1A"/>
+                </a:solidFill>
+                <a:latin typeface="Consolas" pitchFamily="34" charset="0"/>
+                <a:ea typeface="Consolas" pitchFamily="34" charset="-122"/>
+                <a:cs typeface="Consolas" pitchFamily="34" charset="-120"/>
+              </a:rPr>
+              <a:t>    saldo::Float64</a:t>
+            </a:r>
+            <a:endParaRPr lang="en-US" sz="1100" dirty="0"/>
+          </a:p>
+          <a:p>
+            <a:pPr indent="0" marL="0">
+              <a:lnSpc>
+                <a:spcPct val="115000"/>
+              </a:lnSpc>
+              <a:buNone/>
+            </a:pPr>
+            <a:r>
+              <a:rPr lang="en-US" sz="1100" dirty="0">
+                <a:solidFill>
+                  <a:srgbClr val="1A1A1A"/>
+                </a:solidFill>
+                <a:latin typeface="Consolas" pitchFamily="34" charset="0"/>
+                <a:ea typeface="Consolas" pitchFamily="34" charset="-122"/>
+                <a:cs typeface="Consolas" pitchFamily="34" charset="-120"/>
+              </a:rPr>
+              <a:t>    ativa::Bool</a:t>
+            </a:r>
+            <a:endParaRPr lang="en-US" sz="1100" dirty="0"/>
+          </a:p>
+          <a:p>
+            <a:pPr indent="0" marL="0">
+              <a:lnSpc>
+                <a:spcPct val="115000"/>
+              </a:lnSpc>
+              <a:buNone/>
+            </a:pPr>
+            <a:r>
+              <a:rPr lang="en-US" sz="1100" dirty="0">
+                <a:solidFill>
+                  <a:srgbClr val="1A1A1A"/>
+                </a:solidFill>
+                <a:latin typeface="Consolas" pitchFamily="34" charset="0"/>
+                <a:ea typeface="Consolas" pitchFamily="34" charset="-122"/>
+                <a:cs typeface="Consolas" pitchFamily="34" charset="-120"/>
+              </a:rPr>
+              <a:t>end</a:t>
+            </a:r>
+            <a:endParaRPr lang="en-US" sz="1100" dirty="0"/>
+          </a:p>
+          <a:p>
+            <a:pPr indent="0" marL="0">
+              <a:lnSpc>
+                <a:spcPct val="115000"/>
+              </a:lnSpc>
+              <a:buNone/>
+            </a:pPr>
+            <a:endParaRPr lang="en-US" sz="1100" dirty="0"/>
+          </a:p>
+          <a:p>
+            <a:pPr indent="0" marL="0">
+              <a:lnSpc>
+                <a:spcPct val="115000"/>
+              </a:lnSpc>
+              <a:buNone/>
+            </a:pPr>
+            <a:r>
+              <a:rPr lang="en-US" sz="1100" dirty="0">
+                <a:solidFill>
+                  <a:srgbClr val="1A1A1A"/>
+                </a:solidFill>
+                <a:latin typeface="Consolas" pitchFamily="34" charset="0"/>
+                <a:ea typeface="Consolas" pitchFamily="34" charset="-122"/>
+                <a:cs typeface="Consolas" pitchFamily="34" charset="-120"/>
+              </a:rPr>
+              <a:t>conta = ContaBancaria("Maria Silva", 1000.0, true)</a:t>
+            </a:r>
+            <a:endParaRPr lang="en-US" sz="1100" dirty="0"/>
+          </a:p>
+          <a:p>
+            <a:pPr indent="0" marL="0">
+              <a:lnSpc>
+                <a:spcPct val="115000"/>
+              </a:lnSpc>
+              <a:buNone/>
+            </a:pPr>
+            <a:endParaRPr lang="en-US" sz="1100" dirty="0"/>
+          </a:p>
+          <a:p>
+            <a:pPr indent="0" marL="0">
+              <a:lnSpc>
+                <a:spcPct val="115000"/>
+              </a:lnSpc>
+              <a:buNone/>
+            </a:pPr>
+            <a:r>
+              <a:rPr lang="en-US" sz="1100" dirty="0">
+                <a:solidFill>
+                  <a:srgbClr val="1A1A1A"/>
+                </a:solidFill>
+                <a:latin typeface="Consolas" pitchFamily="34" charset="0"/>
+                <a:ea typeface="Consolas" pitchFamily="34" charset="-122"/>
+                <a:cs typeface="Consolas" pitchFamily="34" charset="-120"/>
+              </a:rPr>
+              <a:t># Agora podemos modificar!</a:t>
+            </a:r>
+            <a:endParaRPr lang="en-US" sz="1100" dirty="0"/>
+          </a:p>
+          <a:p>
+            <a:pPr indent="0" marL="0">
+              <a:lnSpc>
+                <a:spcPct val="115000"/>
+              </a:lnSpc>
+              <a:buNone/>
+            </a:pPr>
+            <a:r>
+              <a:rPr lang="en-US" sz="1100" dirty="0">
+                <a:solidFill>
+                  <a:srgbClr val="1A1A1A"/>
+                </a:solidFill>
+                <a:latin typeface="Consolas" pitchFamily="34" charset="0"/>
+                <a:ea typeface="Consolas" pitchFamily="34" charset="-122"/>
+                <a:cs typeface="Consolas" pitchFamily="34" charset="-120"/>
+              </a:rPr>
+              <a:t>conta.saldo = 1500.0</a:t>
+            </a:r>
+            <a:endParaRPr lang="en-US" sz="1100" dirty="0"/>
+          </a:p>
+          <a:p>
+            <a:pPr indent="0" marL="0">
+              <a:lnSpc>
+                <a:spcPct val="115000"/>
+              </a:lnSpc>
+              <a:buNone/>
+            </a:pPr>
+            <a:r>
+              <a:rPr lang="en-US" sz="1100" dirty="0">
+                <a:solidFill>
+                  <a:srgbClr val="1A1A1A"/>
+                </a:solidFill>
+                <a:latin typeface="Consolas" pitchFamily="34" charset="0"/>
+                <a:ea typeface="Consolas" pitchFamily="34" charset="-122"/>
+                <a:cs typeface="Consolas" pitchFamily="34" charset="-120"/>
+              </a:rPr>
+              <a:t>conta.ativa = false</a:t>
+            </a:r>
+            <a:endParaRPr lang="en-US" sz="1100" dirty="0"/>
+          </a:p>
+        </p:txBody>
+      </p:sp>
+      <p:sp>
+        <p:nvSpPr>
+          <p:cNvPr id="7" name="Shape 5"/>
+          <p:cNvSpPr/>
+          <p:nvPr/>
+        </p:nvSpPr>
+        <p:spPr>
+          <a:xfrm>
+            <a:off x="502920" y="3794760"/>
+            <a:ext cx="11185855" cy="2743200"/>
+          </a:xfrm>
+          <a:prstGeom prst="rect">
+            <a:avLst/>
+          </a:prstGeom>
+          <a:solidFill>
+            <a:srgbClr val="EFF5F1"/>
+          </a:solidFill>
+          <a:ln w="9525">
+            <a:solidFill>
+              <a:srgbClr val="C7CFDA"/>
+            </a:solidFill>
+            <a:prstDash val="solid"/>
+          </a:ln>
+        </p:spPr>
+      </p:sp>
+      <p:sp>
+        <p:nvSpPr>
+          <p:cNvPr id="8" name="Shape 6"/>
+          <p:cNvSpPr/>
+          <p:nvPr/>
+        </p:nvSpPr>
+        <p:spPr>
+          <a:xfrm>
+            <a:off x="502920" y="3794760"/>
+            <a:ext cx="54864" cy="2743200"/>
+          </a:xfrm>
+          <a:prstGeom prst="rect">
+            <a:avLst/>
+          </a:prstGeom>
+          <a:solidFill>
+            <a:srgbClr val="2C7A8C"/>
+          </a:solidFill>
+          <a:ln/>
+        </p:spPr>
+      </p:sp>
+      <p:sp>
+        <p:nvSpPr>
+          <p:cNvPr id="9" name="Text 7"/>
+          <p:cNvSpPr/>
+          <p:nvPr/>
+        </p:nvSpPr>
+        <p:spPr>
+          <a:xfrm>
+            <a:off x="731520" y="3886200"/>
+            <a:ext cx="10728655" cy="2560320"/>
+          </a:xfrm>
+          <a:prstGeom prst="rect">
+            <a:avLst/>
+          </a:prstGeom>
+          <a:noFill/>
+          <a:ln/>
+        </p:spPr>
+        <p:txBody>
+          <a:bodyPr wrap="square" rtlCol="0" anchor="t"/>
+          <a:lstStyle/>
+          <a:p>
+            <a:pPr indent="0" marL="0">
+              <a:lnSpc>
+                <a:spcPct val="112000"/>
+              </a:lnSpc>
+              <a:buNone/>
+            </a:pPr>
+            <a:r>
+              <a:rPr lang="en-US" sz="1300" b="1" dirty="0">
+                <a:solidFill>
+                  <a:srgbClr val="1B3A5C"/>
+                </a:solidFill>
+                <a:latin typeface="Consolas" pitchFamily="34" charset="0"/>
+                <a:ea typeface="Consolas" pitchFamily="34" charset="-122"/>
+                <a:cs typeface="Consolas" pitchFamily="34" charset="-120"/>
+              </a:rPr>
+              <a:t>ContaBancaria(...)</a:t>
+            </a:r>
+            <a:pPr indent="0" marL="0">
+              <a:lnSpc>
+                <a:spcPct val="112000"/>
+              </a:lnSpc>
+              <a:buNone/>
+            </a:pPr>
+            <a:r>
+              <a:rPr lang="en-US" sz="1300" dirty="0">
+                <a:solidFill>
+                  <a:srgbClr val="5B6B7A"/>
+                </a:solidFill>
+                <a:latin typeface="Consolas" pitchFamily="34" charset="0"/>
+                <a:ea typeface="Consolas" pitchFamily="34" charset="-122"/>
+                <a:cs typeface="Consolas" pitchFamily="34" charset="-120"/>
+              </a:rPr>
+              <a:t>  →  </a:t>
+            </a:r>
+            <a:pPr indent="0" marL="0">
+              <a:lnSpc>
+                <a:spcPct val="112000"/>
+              </a:lnSpc>
+              <a:buNone/>
+            </a:pPr>
+            <a:r>
+              <a:rPr lang="en-US" sz="1300" dirty="0">
+                <a:solidFill>
+                  <a:srgbClr val="1A1A1A"/>
+                </a:solidFill>
+                <a:latin typeface="Consolas" pitchFamily="34" charset="0"/>
+                <a:ea typeface="Consolas" pitchFamily="34" charset="-122"/>
+                <a:cs typeface="Consolas" pitchFamily="34" charset="-120"/>
+              </a:rPr>
+              <a:t>chama o construtor, associando cada argumento posicional ao campo correspondente:</a:t>
+            </a:r>
+            <a:pPr indent="0" marL="0">
+              <a:lnSpc>
+                <a:spcPct val="112000"/>
+              </a:lnSpc>
+              <a:buNone/>
+            </a:pPr>
+            <a:r>
+              <a:rPr lang="en-US" sz="1300" dirty="0">
+                <a:solidFill>
+                  <a:srgbClr val="000000"/>
+                </a:solidFill>
+              </a:rPr>
+              <a:t>
+</a:t>
+            </a:r>
+            <a:pPr indent="0" marL="0">
+              <a:lnSpc>
+                <a:spcPct val="112000"/>
+              </a:lnSpc>
+              <a:buNone/>
+            </a:pPr>
+            <a:r>
+              <a:rPr lang="en-US" sz="1300" b="1" dirty="0">
+                <a:solidFill>
+                  <a:srgbClr val="1B3A5C"/>
+                </a:solidFill>
+                <a:latin typeface="Consolas" pitchFamily="34" charset="0"/>
+                <a:ea typeface="Consolas" pitchFamily="34" charset="-122"/>
+                <a:cs typeface="Consolas" pitchFamily="34" charset="-120"/>
+              </a:rPr>
+              <a:t>titular</a:t>
+            </a:r>
+            <a:pPr indent="0" marL="0">
+              <a:lnSpc>
+                <a:spcPct val="112000"/>
+              </a:lnSpc>
+              <a:buNone/>
+            </a:pPr>
+            <a:r>
+              <a:rPr lang="en-US" sz="1300" dirty="0">
+                <a:solidFill>
+                  <a:srgbClr val="5B6B7A"/>
+                </a:solidFill>
+                <a:latin typeface="Consolas" pitchFamily="34" charset="0"/>
+                <a:ea typeface="Consolas" pitchFamily="34" charset="-122"/>
+                <a:cs typeface="Consolas" pitchFamily="34" charset="-120"/>
+              </a:rPr>
+              <a:t>  →  </a:t>
+            </a:r>
+            <a:pPr indent="0" marL="0">
+              <a:lnSpc>
+                <a:spcPct val="112000"/>
+              </a:lnSpc>
+              <a:buNone/>
+            </a:pPr>
+            <a:r>
+              <a:rPr lang="en-US" sz="1300" dirty="0">
+                <a:solidFill>
+                  <a:srgbClr val="1A1A1A"/>
+                </a:solidFill>
+                <a:latin typeface="Consolas" pitchFamily="34" charset="0"/>
+                <a:ea typeface="Consolas" pitchFamily="34" charset="-122"/>
+                <a:cs typeface="Consolas" pitchFamily="34" charset="-120"/>
+              </a:rPr>
+              <a:t>"Maria Silva"</a:t>
+            </a:r>
+            <a:pPr indent="0" marL="0">
+              <a:lnSpc>
+                <a:spcPct val="112000"/>
+              </a:lnSpc>
+              <a:buNone/>
+            </a:pPr>
+            <a:r>
+              <a:rPr lang="en-US" sz="1300" dirty="0">
+                <a:solidFill>
+                  <a:srgbClr val="000000"/>
+                </a:solidFill>
+              </a:rPr>
+              <a:t>
+</a:t>
+            </a:r>
+            <a:pPr indent="0" marL="0">
+              <a:lnSpc>
+                <a:spcPct val="112000"/>
+              </a:lnSpc>
+              <a:buNone/>
+            </a:pPr>
+            <a:r>
+              <a:rPr lang="en-US" sz="1300" b="1" dirty="0">
+                <a:solidFill>
+                  <a:srgbClr val="1B3A5C"/>
+                </a:solidFill>
+                <a:latin typeface="Consolas" pitchFamily="34" charset="0"/>
+                <a:ea typeface="Consolas" pitchFamily="34" charset="-122"/>
+                <a:cs typeface="Consolas" pitchFamily="34" charset="-120"/>
+              </a:rPr>
+              <a:t>saldo</a:t>
+            </a:r>
+            <a:pPr indent="0" marL="0">
+              <a:lnSpc>
+                <a:spcPct val="112000"/>
+              </a:lnSpc>
+              <a:buNone/>
+            </a:pPr>
+            <a:r>
+              <a:rPr lang="en-US" sz="1300" dirty="0">
+                <a:solidFill>
+                  <a:srgbClr val="5B6B7A"/>
+                </a:solidFill>
+                <a:latin typeface="Consolas" pitchFamily="34" charset="0"/>
+                <a:ea typeface="Consolas" pitchFamily="34" charset="-122"/>
+                <a:cs typeface="Consolas" pitchFamily="34" charset="-120"/>
+              </a:rPr>
+              <a:t>  →  </a:t>
+            </a:r>
+            <a:pPr indent="0" marL="0">
+              <a:lnSpc>
+                <a:spcPct val="112000"/>
+              </a:lnSpc>
+              <a:buNone/>
+            </a:pPr>
+            <a:r>
+              <a:rPr lang="en-US" sz="1300" dirty="0">
+                <a:solidFill>
+                  <a:srgbClr val="1A1A1A"/>
+                </a:solidFill>
+                <a:latin typeface="Consolas" pitchFamily="34" charset="0"/>
+                <a:ea typeface="Consolas" pitchFamily="34" charset="-122"/>
+                <a:cs typeface="Consolas" pitchFamily="34" charset="-120"/>
+              </a:rPr>
+              <a:t>1000.0</a:t>
+            </a:r>
+            <a:pPr indent="0" marL="0">
+              <a:lnSpc>
+                <a:spcPct val="112000"/>
+              </a:lnSpc>
+              <a:buNone/>
+            </a:pPr>
+            <a:r>
+              <a:rPr lang="en-US" sz="1300" dirty="0">
+                <a:solidFill>
+                  <a:srgbClr val="000000"/>
+                </a:solidFill>
+              </a:rPr>
+              <a:t>
+</a:t>
+            </a:r>
+            <a:pPr indent="0" marL="0">
+              <a:lnSpc>
+                <a:spcPct val="112000"/>
+              </a:lnSpc>
+              <a:buNone/>
+            </a:pPr>
+            <a:r>
+              <a:rPr lang="en-US" sz="1300" b="1" dirty="0">
+                <a:solidFill>
+                  <a:srgbClr val="1B3A5C"/>
+                </a:solidFill>
+                <a:latin typeface="Consolas" pitchFamily="34" charset="0"/>
+                <a:ea typeface="Consolas" pitchFamily="34" charset="-122"/>
+                <a:cs typeface="Consolas" pitchFamily="34" charset="-120"/>
+              </a:rPr>
+              <a:t>ativa</a:t>
+            </a:r>
+            <a:pPr indent="0" marL="0">
+              <a:lnSpc>
+                <a:spcPct val="112000"/>
+              </a:lnSpc>
+              <a:buNone/>
+            </a:pPr>
+            <a:r>
+              <a:rPr lang="en-US" sz="1300" dirty="0">
+                <a:solidFill>
+                  <a:srgbClr val="5B6B7A"/>
+                </a:solidFill>
+                <a:latin typeface="Consolas" pitchFamily="34" charset="0"/>
+                <a:ea typeface="Consolas" pitchFamily="34" charset="-122"/>
+                <a:cs typeface="Consolas" pitchFamily="34" charset="-120"/>
+              </a:rPr>
+              <a:t>  →  </a:t>
+            </a:r>
+            <a:pPr indent="0" marL="0">
+              <a:lnSpc>
+                <a:spcPct val="112000"/>
+              </a:lnSpc>
+              <a:buNone/>
+            </a:pPr>
+            <a:r>
+              <a:rPr lang="en-US" sz="1300" dirty="0">
+                <a:solidFill>
+                  <a:srgbClr val="1A1A1A"/>
+                </a:solidFill>
+                <a:latin typeface="Consolas" pitchFamily="34" charset="0"/>
+                <a:ea typeface="Consolas" pitchFamily="34" charset="-122"/>
+                <a:cs typeface="Consolas" pitchFamily="34" charset="-120"/>
+              </a:rPr>
+              <a:t>true</a:t>
+            </a:r>
+            <a:pPr indent="0" marL="0">
+              <a:lnSpc>
+                <a:spcPct val="112000"/>
+              </a:lnSpc>
+              <a:buNone/>
+            </a:pPr>
+            <a:r>
+              <a:rPr lang="en-US" sz="1300" dirty="0">
+                <a:solidFill>
+                  <a:srgbClr val="000000"/>
+                </a:solidFill>
+              </a:rPr>
+              <a:t>
+</a:t>
+            </a:r>
+            <a:pPr indent="0" marL="0">
+              <a:lnSpc>
+                <a:spcPct val="112000"/>
+              </a:lnSpc>
+              <a:buNone/>
+            </a:pPr>
+            <a:r>
+              <a:rPr lang="en-US" sz="1300" b="1" dirty="0">
+                <a:solidFill>
+                  <a:srgbClr val="1B3A5C"/>
+                </a:solidFill>
+                <a:latin typeface="Consolas" pitchFamily="34" charset="0"/>
+                <a:ea typeface="Consolas" pitchFamily="34" charset="-122"/>
+                <a:cs typeface="Consolas" pitchFamily="34" charset="-120"/>
+              </a:rPr>
+              <a:t>conta</a:t>
+            </a:r>
+            <a:pPr indent="0" marL="0">
+              <a:lnSpc>
+                <a:spcPct val="112000"/>
+              </a:lnSpc>
+              <a:buNone/>
+            </a:pPr>
+            <a:r>
+              <a:rPr lang="en-US" sz="1300" dirty="0">
+                <a:solidFill>
+                  <a:srgbClr val="5B6B7A"/>
+                </a:solidFill>
+                <a:latin typeface="Consolas" pitchFamily="34" charset="0"/>
+                <a:ea typeface="Consolas" pitchFamily="34" charset="-122"/>
+                <a:cs typeface="Consolas" pitchFamily="34" charset="-120"/>
+              </a:rPr>
+              <a:t>  →  </a:t>
+            </a:r>
+            <a:pPr indent="0" marL="0">
+              <a:lnSpc>
+                <a:spcPct val="112000"/>
+              </a:lnSpc>
+              <a:buNone/>
+            </a:pPr>
+            <a:r>
+              <a:rPr lang="en-US" sz="1300" dirty="0">
+                <a:solidFill>
+                  <a:srgbClr val="1A1A1A"/>
+                </a:solidFill>
+                <a:latin typeface="Consolas" pitchFamily="34" charset="0"/>
+                <a:ea typeface="Consolas" pitchFamily="34" charset="-122"/>
+                <a:cs typeface="Consolas" pitchFamily="34" charset="-120"/>
+              </a:rPr>
+              <a:t>ContaBancaria("Maria Silva", 1000.0, true)  (uma instância mutável)</a:t>
+            </a:r>
+            <a:pPr indent="0" marL="0">
+              <a:lnSpc>
+                <a:spcPct val="112000"/>
+              </a:lnSpc>
+              <a:buNone/>
+            </a:pPr>
+            <a:r>
+              <a:rPr lang="en-US" sz="1300" dirty="0">
+                <a:solidFill>
+                  <a:srgbClr val="000000"/>
+                </a:solidFill>
+              </a:rPr>
+              <a:t>
+</a:t>
+            </a:r>
+            <a:pPr indent="0" marL="0">
+              <a:lnSpc>
+                <a:spcPct val="112000"/>
+              </a:lnSpc>
+              <a:buNone/>
+            </a:pPr>
+            <a:r>
+              <a:rPr lang="en-US" sz="1300" b="1" dirty="0">
+                <a:solidFill>
+                  <a:srgbClr val="1B3A5C"/>
+                </a:solidFill>
+                <a:latin typeface="Consolas" pitchFamily="34" charset="0"/>
+                <a:ea typeface="Consolas" pitchFamily="34" charset="-122"/>
+                <a:cs typeface="Consolas" pitchFamily="34" charset="-120"/>
+              </a:rPr>
+              <a:t>conta.saldo = 1500.0</a:t>
+            </a:r>
+            <a:pPr indent="0" marL="0">
+              <a:lnSpc>
+                <a:spcPct val="112000"/>
+              </a:lnSpc>
+              <a:buNone/>
+            </a:pPr>
+            <a:r>
+              <a:rPr lang="en-US" sz="1300" dirty="0">
+                <a:solidFill>
+                  <a:srgbClr val="5B6B7A"/>
+                </a:solidFill>
+                <a:latin typeface="Consolas" pitchFamily="34" charset="0"/>
+                <a:ea typeface="Consolas" pitchFamily="34" charset="-122"/>
+                <a:cs typeface="Consolas" pitchFamily="34" charset="-120"/>
+              </a:rPr>
+              <a:t>  →  </a:t>
+            </a:r>
+            <a:pPr indent="0" marL="0">
+              <a:lnSpc>
+                <a:spcPct val="112000"/>
+              </a:lnSpc>
+              <a:buNone/>
+            </a:pPr>
+            <a:r>
+              <a:rPr lang="en-US" sz="1300" dirty="0">
+                <a:solidFill>
+                  <a:srgbClr val="1A1A1A"/>
+                </a:solidFill>
+                <a:latin typeface="Consolas" pitchFamily="34" charset="0"/>
+                <a:ea typeface="Consolas" pitchFamily="34" charset="-122"/>
+                <a:cs typeface="Consolas" pitchFamily="34" charset="-120"/>
+              </a:rPr>
+              <a:t>sobrescreve o campo saldo — conta passa a ter saldo = 1500.0</a:t>
+            </a:r>
+            <a:pPr indent="0" marL="0">
+              <a:lnSpc>
+                <a:spcPct val="112000"/>
+              </a:lnSpc>
+              <a:buNone/>
+            </a:pPr>
+            <a:r>
+              <a:rPr lang="en-US" sz="1300" dirty="0">
+                <a:solidFill>
+                  <a:srgbClr val="000000"/>
+                </a:solidFill>
+              </a:rPr>
+              <a:t>
+</a:t>
+            </a:r>
+            <a:pPr indent="0" marL="0">
+              <a:lnSpc>
+                <a:spcPct val="112000"/>
+              </a:lnSpc>
+              <a:buNone/>
+            </a:pPr>
+            <a:r>
+              <a:rPr lang="en-US" sz="1300" b="1" dirty="0">
+                <a:solidFill>
+                  <a:srgbClr val="1B3A5C"/>
+                </a:solidFill>
+                <a:latin typeface="Consolas" pitchFamily="34" charset="0"/>
+                <a:ea typeface="Consolas" pitchFamily="34" charset="-122"/>
+                <a:cs typeface="Consolas" pitchFamily="34" charset="-120"/>
+              </a:rPr>
+              <a:t>conta.ativa = false</a:t>
+            </a:r>
+            <a:pPr indent="0" marL="0">
+              <a:lnSpc>
+                <a:spcPct val="112000"/>
+              </a:lnSpc>
+              <a:buNone/>
+            </a:pPr>
+            <a:r>
+              <a:rPr lang="en-US" sz="1300" dirty="0">
+                <a:solidFill>
+                  <a:srgbClr val="5B6B7A"/>
+                </a:solidFill>
+                <a:latin typeface="Consolas" pitchFamily="34" charset="0"/>
+                <a:ea typeface="Consolas" pitchFamily="34" charset="-122"/>
+                <a:cs typeface="Consolas" pitchFamily="34" charset="-120"/>
+              </a:rPr>
+              <a:t>  →  </a:t>
+            </a:r>
+            <a:pPr indent="0" marL="0">
+              <a:lnSpc>
+                <a:spcPct val="112000"/>
+              </a:lnSpc>
+              <a:buNone/>
+            </a:pPr>
+            <a:r>
+              <a:rPr lang="en-US" sz="1300" dirty="0">
+                <a:solidFill>
+                  <a:srgbClr val="1A1A1A"/>
+                </a:solidFill>
+                <a:latin typeface="Consolas" pitchFamily="34" charset="0"/>
+                <a:ea typeface="Consolas" pitchFamily="34" charset="-122"/>
+                <a:cs typeface="Consolas" pitchFamily="34" charset="-120"/>
+              </a:rPr>
+              <a:t>sobrescreve o campo ativa — conta passa a ter ativa = false</a:t>
+            </a:r>
+            <a:endParaRPr lang="en-US" sz="1300" dirty="0"/>
+          </a:p>
+        </p:txBody>
+      </p:sp>
+    </p:spTree>
+  </p:cSld>
+  <p:clrMapOvr>
+    <a:masterClrMapping/>
+  </p:clrMapOvr>
+</p:sld>
+</file>
+
+<file path=ppt/slides/slide9.xml><?xml version="1.0" encoding="utf-8"?>
 <p:sld xmlns:a="http://schemas.openxmlformats.org/drawingml/2006/main" xmlns:r="http://schemas.openxmlformats.org/officeDocument/2006/relationships" xmlns:p="http://schemas.openxmlformats.org/presentationml/2006/main">
   <p:cSld name="Slide 7">
     <p:bg>
@@ -6386,1675 +8281,6 @@
               <a:t>07 / 07</a:t>
             </a:r>
             <a:endParaRPr lang="en-US" sz="1000" dirty="0"/>
-          </a:p>
-        </p:txBody>
-      </p:sp>
-    </p:spTree>
-  </p:cSld>
-  <p:clrMapOvr>
-    <a:masterClrMapping/>
-  </p:clrMapOvr>
-</p:sld>
-</file>
-
-<file path=ppt/slides/slide8.xml><?xml version="1.0" encoding="utf-8"?>
-<p:sld xmlns:a="http://schemas.openxmlformats.org/drawingml/2006/main" xmlns:r="http://schemas.openxmlformats.org/officeDocument/2006/relationships" xmlns:p="http://schemas.openxmlformats.org/presentationml/2006/main">
-  <p:cSld name="Slide 2">
-    <p:bg>
-      <p:bgPr>
-        <a:solidFill>
-          <a:srgbClr val="FFFFFF"/>
-        </a:solidFill>
-      </p:bgPr>
-    </p:bg>
-    <p:spTree>
-      <p:nvGrpSpPr>
-        <p:cNvPr id="1" name=""/>
-        <p:cNvGrpSpPr/>
-        <p:nvPr/>
-      </p:nvGrpSpPr>
-      <p:grpSpPr>
-        <a:xfrm>
-          <a:off x="0" y="0"/>
-          <a:ext cx="0" cy="0"/>
-          <a:chOff x="0" y="0"/>
-          <a:chExt cx="0" cy="0"/>
-        </a:xfrm>
-      </p:grpSpPr>
-      <p:sp>
-        <p:nvSpPr>
-          <p:cNvPr id="2" name="Text 0"/>
-          <p:cNvSpPr/>
-          <p:nvPr/>
-        </p:nvSpPr>
-        <p:spPr>
-          <a:xfrm>
-            <a:off x="502920" y="320040"/>
-            <a:ext cx="11185855" cy="365760"/>
-          </a:xfrm>
-          <a:prstGeom prst="rect">
-            <a:avLst/>
-          </a:prstGeom>
-          <a:noFill/>
-          <a:ln/>
-        </p:spPr>
-        <p:txBody>
-          <a:bodyPr wrap="square" rtlCol="0" anchor="ctr"/>
-          <a:lstStyle/>
-          <a:p>
-            <a:pPr indent="0" marL="0">
-              <a:buNone/>
-            </a:pPr>
-            <a:r>
-              <a:rPr lang="en-US" sz="1300" b="1" spc="200" kern="0" dirty="0">
-                <a:solidFill>
-                  <a:srgbClr val="B5651D"/>
-                </a:solidFill>
-                <a:latin typeface="Calibri" pitchFamily="34" charset="0"/>
-                <a:ea typeface="Calibri" pitchFamily="34" charset="-122"/>
-                <a:cs typeface="Calibri" pitchFamily="34" charset="-120"/>
-              </a:rPr>
-              <a:t>AULA 11  ·  Exemplo — Tipo e Instância</a:t>
-            </a:r>
-            <a:endParaRPr lang="en-US" sz="1300" dirty="0"/>
-          </a:p>
-        </p:txBody>
-      </p:sp>
-      <p:sp>
-        <p:nvSpPr>
-          <p:cNvPr id="3" name="Text 1"/>
-          <p:cNvSpPr/>
-          <p:nvPr/>
-        </p:nvSpPr>
-        <p:spPr>
-          <a:xfrm>
-            <a:off x="502920" y="658368"/>
-            <a:ext cx="11185855" cy="502920"/>
-          </a:xfrm>
-          <a:prstGeom prst="rect">
-            <a:avLst/>
-          </a:prstGeom>
-          <a:noFill/>
-          <a:ln/>
-        </p:spPr>
-        <p:txBody>
-          <a:bodyPr wrap="square" rtlCol="0" anchor="ctr"/>
-          <a:lstStyle/>
-          <a:p>
-            <a:pPr indent="0" marL="0">
-              <a:buNone/>
-            </a:pPr>
-            <a:r>
-              <a:rPr lang="en-US" sz="1900" b="1" dirty="0">
-                <a:solidFill>
-                  <a:srgbClr val="1B3A5C"/>
-                </a:solidFill>
-                <a:latin typeface="Calibri" pitchFamily="34" charset="0"/>
-                <a:ea typeface="Calibri" pitchFamily="34" charset="-122"/>
-                <a:cs typeface="Calibri" pitchFamily="34" charset="-120"/>
-              </a:rPr>
-              <a:t>Como criar uma instância de um novo tipo?</a:t>
-            </a:r>
-            <a:endParaRPr lang="en-US" sz="1900" dirty="0"/>
-          </a:p>
-        </p:txBody>
-      </p:sp>
-      <p:sp>
-        <p:nvSpPr>
-          <p:cNvPr id="4" name="Shape 2"/>
-          <p:cNvSpPr/>
-          <p:nvPr/>
-        </p:nvSpPr>
-        <p:spPr>
-          <a:xfrm>
-            <a:off x="502920" y="1298448"/>
-            <a:ext cx="11185855" cy="2148840"/>
-          </a:xfrm>
-          <a:prstGeom prst="rect">
-            <a:avLst/>
-          </a:prstGeom>
-          <a:solidFill>
-            <a:srgbClr val="F2F4F7"/>
-          </a:solidFill>
-          <a:ln w="9525">
-            <a:solidFill>
-              <a:srgbClr val="C7CFDA"/>
-            </a:solidFill>
-            <a:prstDash val="solid"/>
-          </a:ln>
-        </p:spPr>
-      </p:sp>
-      <p:sp>
-        <p:nvSpPr>
-          <p:cNvPr id="5" name="Shape 3"/>
-          <p:cNvSpPr/>
-          <p:nvPr/>
-        </p:nvSpPr>
-        <p:spPr>
-          <a:xfrm>
-            <a:off x="502920" y="1298448"/>
-            <a:ext cx="54864" cy="2148840"/>
-          </a:xfrm>
-          <a:prstGeom prst="rect">
-            <a:avLst/>
-          </a:prstGeom>
-          <a:solidFill>
-            <a:srgbClr val="2C7A8C"/>
-          </a:solidFill>
-          <a:ln/>
-        </p:spPr>
-      </p:sp>
-      <p:sp>
-        <p:nvSpPr>
-          <p:cNvPr id="6" name="Text 4"/>
-          <p:cNvSpPr/>
-          <p:nvPr/>
-        </p:nvSpPr>
-        <p:spPr>
-          <a:xfrm>
-            <a:off x="731520" y="1371600"/>
-            <a:ext cx="10728655" cy="2002536"/>
-          </a:xfrm>
-          <a:prstGeom prst="rect">
-            <a:avLst/>
-          </a:prstGeom>
-          <a:noFill/>
-          <a:ln/>
-        </p:spPr>
-        <p:txBody>
-          <a:bodyPr wrap="square" rtlCol="0" anchor="t"/>
-          <a:lstStyle/>
-          <a:p>
-            <a:pPr indent="0" marL="0">
-              <a:lnSpc>
-                <a:spcPct val="115000"/>
-              </a:lnSpc>
-              <a:buNone/>
-            </a:pPr>
-            <a:r>
-              <a:rPr lang="en-US" sz="1200" dirty="0">
-                <a:solidFill>
-                  <a:srgbClr val="1A1A1A"/>
-                </a:solidFill>
-                <a:latin typeface="Consolas" pitchFamily="34" charset="0"/>
-                <a:ea typeface="Consolas" pitchFamily="34" charset="-122"/>
-                <a:cs typeface="Consolas" pitchFamily="34" charset="-120"/>
-              </a:rPr>
-              <a:t>Carro</a:t>
-            </a:r>
-            <a:endParaRPr lang="en-US" sz="1200" dirty="0"/>
-          </a:p>
-          <a:p>
-            <a:pPr indent="0" marL="0">
-              <a:lnSpc>
-                <a:spcPct val="115000"/>
-              </a:lnSpc>
-              <a:buNone/>
-            </a:pPr>
-            <a:r>
-              <a:rPr lang="en-US" sz="1200" dirty="0">
-                <a:solidFill>
-                  <a:srgbClr val="1A1A1A"/>
-                </a:solidFill>
-                <a:latin typeface="Consolas" pitchFamily="34" charset="0"/>
-                <a:ea typeface="Consolas" pitchFamily="34" charset="-122"/>
-                <a:cs typeface="Consolas" pitchFamily="34" charset="-120"/>
-              </a:rPr>
-              <a:t>    marca::String</a:t>
-            </a:r>
-            <a:endParaRPr lang="en-US" sz="1200" dirty="0"/>
-          </a:p>
-          <a:p>
-            <a:pPr indent="0" marL="0">
-              <a:lnSpc>
-                <a:spcPct val="115000"/>
-              </a:lnSpc>
-              <a:buNone/>
-            </a:pPr>
-            <a:r>
-              <a:rPr lang="en-US" sz="1200" dirty="0">
-                <a:solidFill>
-                  <a:srgbClr val="1A1A1A"/>
-                </a:solidFill>
-                <a:latin typeface="Consolas" pitchFamily="34" charset="0"/>
-                <a:ea typeface="Consolas" pitchFamily="34" charset="-122"/>
-                <a:cs typeface="Consolas" pitchFamily="34" charset="-120"/>
-              </a:rPr>
-              <a:t>    modelo::String</a:t>
-            </a:r>
-            <a:endParaRPr lang="en-US" sz="1200" dirty="0"/>
-          </a:p>
-          <a:p>
-            <a:pPr indent="0" marL="0">
-              <a:lnSpc>
-                <a:spcPct val="115000"/>
-              </a:lnSpc>
-              <a:buNone/>
-            </a:pPr>
-            <a:r>
-              <a:rPr lang="en-US" sz="1200" dirty="0">
-                <a:solidFill>
-                  <a:srgbClr val="1A1A1A"/>
-                </a:solidFill>
-                <a:latin typeface="Consolas" pitchFamily="34" charset="0"/>
-                <a:ea typeface="Consolas" pitchFamily="34" charset="-122"/>
-                <a:cs typeface="Consolas" pitchFamily="34" charset="-120"/>
-              </a:rPr>
-              <a:t>    ano::Int</a:t>
-            </a:r>
-            <a:endParaRPr lang="en-US" sz="1200" dirty="0"/>
-          </a:p>
-          <a:p>
-            <a:pPr indent="0" marL="0">
-              <a:lnSpc>
-                <a:spcPct val="115000"/>
-              </a:lnSpc>
-              <a:buNone/>
-            </a:pPr>
-            <a:r>
-              <a:rPr lang="en-US" sz="1200" dirty="0">
-                <a:solidFill>
-                  <a:srgbClr val="1A1A1A"/>
-                </a:solidFill>
-                <a:latin typeface="Consolas" pitchFamily="34" charset="0"/>
-                <a:ea typeface="Consolas" pitchFamily="34" charset="-122"/>
-                <a:cs typeface="Consolas" pitchFamily="34" charset="-120"/>
-              </a:rPr>
-              <a:t>    velocidade::Float64</a:t>
-            </a:r>
-            <a:endParaRPr lang="en-US" sz="1200" dirty="0"/>
-          </a:p>
-          <a:p>
-            <a:pPr indent="0" marL="0">
-              <a:lnSpc>
-                <a:spcPct val="115000"/>
-              </a:lnSpc>
-              <a:buNone/>
-            </a:pPr>
-            <a:r>
-              <a:rPr lang="en-US" sz="1200" dirty="0">
-                <a:solidFill>
-                  <a:srgbClr val="1A1A1A"/>
-                </a:solidFill>
-                <a:latin typeface="Consolas" pitchFamily="34" charset="0"/>
-                <a:ea typeface="Consolas" pitchFamily="34" charset="-122"/>
-                <a:cs typeface="Consolas" pitchFamily="34" charset="-120"/>
-              </a:rPr>
-              <a:t>fim</a:t>
-            </a:r>
-            <a:endParaRPr lang="en-US" sz="1200" dirty="0"/>
-          </a:p>
-          <a:p>
-            <a:pPr indent="0" marL="0">
-              <a:lnSpc>
-                <a:spcPct val="115000"/>
-              </a:lnSpc>
-              <a:buNone/>
-            </a:pPr>
-            <a:endParaRPr lang="en-US" sz="1200" dirty="0"/>
-          </a:p>
-          <a:p>
-            <a:pPr indent="0" marL="0">
-              <a:lnSpc>
-                <a:spcPct val="115000"/>
-              </a:lnSpc>
-              <a:buNone/>
-            </a:pPr>
-            <a:r>
-              <a:rPr lang="en-US" sz="1200" dirty="0">
-                <a:solidFill>
-                  <a:srgbClr val="1A1A1A"/>
-                </a:solidFill>
-                <a:latin typeface="Consolas" pitchFamily="34" charset="0"/>
-                <a:ea typeface="Consolas" pitchFamily="34" charset="-122"/>
-                <a:cs typeface="Consolas" pitchFamily="34" charset="-120"/>
-              </a:rPr>
-              <a:t>meu_carro = Carro("Toyota", "Corolla", 2023, 0.0)</a:t>
-            </a:r>
-            <a:endParaRPr lang="en-US" sz="1200" dirty="0"/>
-          </a:p>
-        </p:txBody>
-      </p:sp>
-      <p:sp>
-        <p:nvSpPr>
-          <p:cNvPr id="7" name="Shape 5"/>
-          <p:cNvSpPr/>
-          <p:nvPr/>
-        </p:nvSpPr>
-        <p:spPr>
-          <a:xfrm>
-            <a:off x="502920" y="3611880"/>
-            <a:ext cx="11185855" cy="2926080"/>
-          </a:xfrm>
-          <a:prstGeom prst="rect">
-            <a:avLst/>
-          </a:prstGeom>
-          <a:solidFill>
-            <a:srgbClr val="EFF5F1"/>
-          </a:solidFill>
-          <a:ln w="9525">
-            <a:solidFill>
-              <a:srgbClr val="C7CFDA"/>
-            </a:solidFill>
-            <a:prstDash val="solid"/>
-          </a:ln>
-        </p:spPr>
-      </p:sp>
-      <p:sp>
-        <p:nvSpPr>
-          <p:cNvPr id="8" name="Shape 6"/>
-          <p:cNvSpPr/>
-          <p:nvPr/>
-        </p:nvSpPr>
-        <p:spPr>
-          <a:xfrm>
-            <a:off x="502920" y="3611880"/>
-            <a:ext cx="54864" cy="2926080"/>
-          </a:xfrm>
-          <a:prstGeom prst="rect">
-            <a:avLst/>
-          </a:prstGeom>
-          <a:solidFill>
-            <a:srgbClr val="2C7A8C"/>
-          </a:solidFill>
-          <a:ln/>
-        </p:spPr>
-      </p:sp>
-      <p:sp>
-        <p:nvSpPr>
-          <p:cNvPr id="9" name="Text 7"/>
-          <p:cNvSpPr/>
-          <p:nvPr/>
-        </p:nvSpPr>
-        <p:spPr>
-          <a:xfrm>
-            <a:off x="731520" y="3703320"/>
-            <a:ext cx="10728655" cy="2743200"/>
-          </a:xfrm>
-          <a:prstGeom prst="rect">
-            <a:avLst/>
-          </a:prstGeom>
-          <a:noFill/>
-          <a:ln/>
-        </p:spPr>
-        <p:txBody>
-          <a:bodyPr wrap="square" rtlCol="0" anchor="t"/>
-          <a:lstStyle/>
-          <a:p>
-            <a:pPr indent="0" marL="0">
-              <a:lnSpc>
-                <a:spcPct val="112000"/>
-              </a:lnSpc>
-              <a:buNone/>
-            </a:pPr>
-            <a:r>
-              <a:rPr lang="en-US" sz="1300" b="1" dirty="0">
-                <a:solidFill>
-                  <a:srgbClr val="1B3A5C"/>
-                </a:solidFill>
-                <a:latin typeface="Consolas" pitchFamily="34" charset="0"/>
-                <a:ea typeface="Consolas" pitchFamily="34" charset="-122"/>
-                <a:cs typeface="Consolas" pitchFamily="34" charset="-120"/>
-              </a:rPr>
-              <a:t>Carro(...)</a:t>
-            </a:r>
-            <a:pPr indent="0" marL="0">
-              <a:lnSpc>
-                <a:spcPct val="112000"/>
-              </a:lnSpc>
-              <a:buNone/>
-            </a:pPr>
-            <a:r>
-              <a:rPr lang="en-US" sz="1300" dirty="0">
-                <a:solidFill>
-                  <a:srgbClr val="5B6B7A"/>
-                </a:solidFill>
-                <a:latin typeface="Consolas" pitchFamily="34" charset="0"/>
-                <a:ea typeface="Consolas" pitchFamily="34" charset="-122"/>
-                <a:cs typeface="Consolas" pitchFamily="34" charset="-120"/>
-              </a:rPr>
-              <a:t>  →  </a:t>
-            </a:r>
-            <a:pPr indent="0" marL="0">
-              <a:lnSpc>
-                <a:spcPct val="112000"/>
-              </a:lnSpc>
-              <a:buNone/>
-            </a:pPr>
-            <a:r>
-              <a:rPr lang="en-US" sz="1300" dirty="0">
-                <a:solidFill>
-                  <a:srgbClr val="1A1A1A"/>
-                </a:solidFill>
-                <a:latin typeface="Consolas" pitchFamily="34" charset="0"/>
-                <a:ea typeface="Consolas" pitchFamily="34" charset="-122"/>
-                <a:cs typeface="Consolas" pitchFamily="34" charset="-120"/>
-              </a:rPr>
-              <a:t>chama o construtor do tipo Carro, associando cada argumento posicional ao campo correspondente:</a:t>
-            </a:r>
-            <a:pPr indent="0" marL="0">
-              <a:lnSpc>
-                <a:spcPct val="112000"/>
-              </a:lnSpc>
-              <a:buNone/>
-            </a:pPr>
-            <a:r>
-              <a:rPr lang="en-US" sz="1300" dirty="0">
-                <a:solidFill>
-                  <a:srgbClr val="000000"/>
-                </a:solidFill>
-              </a:rPr>
-              <a:t>
-</a:t>
-            </a:r>
-            <a:pPr indent="0" marL="0">
-              <a:lnSpc>
-                <a:spcPct val="112000"/>
-              </a:lnSpc>
-              <a:buNone/>
-            </a:pPr>
-            <a:r>
-              <a:rPr lang="en-US" sz="1300" b="1" dirty="0">
-                <a:solidFill>
-                  <a:srgbClr val="1B3A5C"/>
-                </a:solidFill>
-                <a:latin typeface="Consolas" pitchFamily="34" charset="0"/>
-                <a:ea typeface="Consolas" pitchFamily="34" charset="-122"/>
-                <a:cs typeface="Consolas" pitchFamily="34" charset="-120"/>
-              </a:rPr>
-              <a:t>marca</a:t>
-            </a:r>
-            <a:pPr indent="0" marL="0">
-              <a:lnSpc>
-                <a:spcPct val="112000"/>
-              </a:lnSpc>
-              <a:buNone/>
-            </a:pPr>
-            <a:r>
-              <a:rPr lang="en-US" sz="1300" dirty="0">
-                <a:solidFill>
-                  <a:srgbClr val="5B6B7A"/>
-                </a:solidFill>
-                <a:latin typeface="Consolas" pitchFamily="34" charset="0"/>
-                <a:ea typeface="Consolas" pitchFamily="34" charset="-122"/>
-                <a:cs typeface="Consolas" pitchFamily="34" charset="-120"/>
-              </a:rPr>
-              <a:t>  →  </a:t>
-            </a:r>
-            <a:pPr indent="0" marL="0">
-              <a:lnSpc>
-                <a:spcPct val="112000"/>
-              </a:lnSpc>
-              <a:buNone/>
-            </a:pPr>
-            <a:r>
-              <a:rPr lang="en-US" sz="1300" dirty="0">
-                <a:solidFill>
-                  <a:srgbClr val="1A1A1A"/>
-                </a:solidFill>
-                <a:latin typeface="Consolas" pitchFamily="34" charset="0"/>
-                <a:ea typeface="Consolas" pitchFamily="34" charset="-122"/>
-                <a:cs typeface="Consolas" pitchFamily="34" charset="-120"/>
-              </a:rPr>
-              <a:t>"Toyota"</a:t>
-            </a:r>
-            <a:pPr indent="0" marL="0">
-              <a:lnSpc>
-                <a:spcPct val="112000"/>
-              </a:lnSpc>
-              <a:buNone/>
-            </a:pPr>
-            <a:r>
-              <a:rPr lang="en-US" sz="1300" dirty="0">
-                <a:solidFill>
-                  <a:srgbClr val="000000"/>
-                </a:solidFill>
-              </a:rPr>
-              <a:t>
-</a:t>
-            </a:r>
-            <a:pPr indent="0" marL="0">
-              <a:lnSpc>
-                <a:spcPct val="112000"/>
-              </a:lnSpc>
-              <a:buNone/>
-            </a:pPr>
-            <a:r>
-              <a:rPr lang="en-US" sz="1300" b="1" dirty="0">
-                <a:solidFill>
-                  <a:srgbClr val="1B3A5C"/>
-                </a:solidFill>
-                <a:latin typeface="Consolas" pitchFamily="34" charset="0"/>
-                <a:ea typeface="Consolas" pitchFamily="34" charset="-122"/>
-                <a:cs typeface="Consolas" pitchFamily="34" charset="-120"/>
-              </a:rPr>
-              <a:t>modelo</a:t>
-            </a:r>
-            <a:pPr indent="0" marL="0">
-              <a:lnSpc>
-                <a:spcPct val="112000"/>
-              </a:lnSpc>
-              <a:buNone/>
-            </a:pPr>
-            <a:r>
-              <a:rPr lang="en-US" sz="1300" dirty="0">
-                <a:solidFill>
-                  <a:srgbClr val="5B6B7A"/>
-                </a:solidFill>
-                <a:latin typeface="Consolas" pitchFamily="34" charset="0"/>
-                <a:ea typeface="Consolas" pitchFamily="34" charset="-122"/>
-                <a:cs typeface="Consolas" pitchFamily="34" charset="-120"/>
-              </a:rPr>
-              <a:t>  →  </a:t>
-            </a:r>
-            <a:pPr indent="0" marL="0">
-              <a:lnSpc>
-                <a:spcPct val="112000"/>
-              </a:lnSpc>
-              <a:buNone/>
-            </a:pPr>
-            <a:r>
-              <a:rPr lang="en-US" sz="1300" dirty="0">
-                <a:solidFill>
-                  <a:srgbClr val="1A1A1A"/>
-                </a:solidFill>
-                <a:latin typeface="Consolas" pitchFamily="34" charset="0"/>
-                <a:ea typeface="Consolas" pitchFamily="34" charset="-122"/>
-                <a:cs typeface="Consolas" pitchFamily="34" charset="-120"/>
-              </a:rPr>
-              <a:t>"Corolla"</a:t>
-            </a:r>
-            <a:pPr indent="0" marL="0">
-              <a:lnSpc>
-                <a:spcPct val="112000"/>
-              </a:lnSpc>
-              <a:buNone/>
-            </a:pPr>
-            <a:r>
-              <a:rPr lang="en-US" sz="1300" dirty="0">
-                <a:solidFill>
-                  <a:srgbClr val="000000"/>
-                </a:solidFill>
-              </a:rPr>
-              <a:t>
-</a:t>
-            </a:r>
-            <a:pPr indent="0" marL="0">
-              <a:lnSpc>
-                <a:spcPct val="112000"/>
-              </a:lnSpc>
-              <a:buNone/>
-            </a:pPr>
-            <a:r>
-              <a:rPr lang="en-US" sz="1300" b="1" dirty="0">
-                <a:solidFill>
-                  <a:srgbClr val="1B3A5C"/>
-                </a:solidFill>
-                <a:latin typeface="Consolas" pitchFamily="34" charset="0"/>
-                <a:ea typeface="Consolas" pitchFamily="34" charset="-122"/>
-                <a:cs typeface="Consolas" pitchFamily="34" charset="-120"/>
-              </a:rPr>
-              <a:t>ano</a:t>
-            </a:r>
-            <a:pPr indent="0" marL="0">
-              <a:lnSpc>
-                <a:spcPct val="112000"/>
-              </a:lnSpc>
-              <a:buNone/>
-            </a:pPr>
-            <a:r>
-              <a:rPr lang="en-US" sz="1300" dirty="0">
-                <a:solidFill>
-                  <a:srgbClr val="5B6B7A"/>
-                </a:solidFill>
-                <a:latin typeface="Consolas" pitchFamily="34" charset="0"/>
-                <a:ea typeface="Consolas" pitchFamily="34" charset="-122"/>
-                <a:cs typeface="Consolas" pitchFamily="34" charset="-120"/>
-              </a:rPr>
-              <a:t>  →  </a:t>
-            </a:r>
-            <a:pPr indent="0" marL="0">
-              <a:lnSpc>
-                <a:spcPct val="112000"/>
-              </a:lnSpc>
-              <a:buNone/>
-            </a:pPr>
-            <a:r>
-              <a:rPr lang="en-US" sz="1300" dirty="0">
-                <a:solidFill>
-                  <a:srgbClr val="1A1A1A"/>
-                </a:solidFill>
-                <a:latin typeface="Consolas" pitchFamily="34" charset="0"/>
-                <a:ea typeface="Consolas" pitchFamily="34" charset="-122"/>
-                <a:cs typeface="Consolas" pitchFamily="34" charset="-120"/>
-              </a:rPr>
-              <a:t>2023</a:t>
-            </a:r>
-            <a:pPr indent="0" marL="0">
-              <a:lnSpc>
-                <a:spcPct val="112000"/>
-              </a:lnSpc>
-              <a:buNone/>
-            </a:pPr>
-            <a:r>
-              <a:rPr lang="en-US" sz="1300" dirty="0">
-                <a:solidFill>
-                  <a:srgbClr val="000000"/>
-                </a:solidFill>
-              </a:rPr>
-              <a:t>
-</a:t>
-            </a:r>
-            <a:pPr indent="0" marL="0">
-              <a:lnSpc>
-                <a:spcPct val="112000"/>
-              </a:lnSpc>
-              <a:buNone/>
-            </a:pPr>
-            <a:r>
-              <a:rPr lang="en-US" sz="1300" b="1" dirty="0">
-                <a:solidFill>
-                  <a:srgbClr val="1B3A5C"/>
-                </a:solidFill>
-                <a:latin typeface="Consolas" pitchFamily="34" charset="0"/>
-                <a:ea typeface="Consolas" pitchFamily="34" charset="-122"/>
-                <a:cs typeface="Consolas" pitchFamily="34" charset="-120"/>
-              </a:rPr>
-              <a:t>velocidade</a:t>
-            </a:r>
-            <a:pPr indent="0" marL="0">
-              <a:lnSpc>
-                <a:spcPct val="112000"/>
-              </a:lnSpc>
-              <a:buNone/>
-            </a:pPr>
-            <a:r>
-              <a:rPr lang="en-US" sz="1300" dirty="0">
-                <a:solidFill>
-                  <a:srgbClr val="5B6B7A"/>
-                </a:solidFill>
-                <a:latin typeface="Consolas" pitchFamily="34" charset="0"/>
-                <a:ea typeface="Consolas" pitchFamily="34" charset="-122"/>
-                <a:cs typeface="Consolas" pitchFamily="34" charset="-120"/>
-              </a:rPr>
-              <a:t>  →  </a:t>
-            </a:r>
-            <a:pPr indent="0" marL="0">
-              <a:lnSpc>
-                <a:spcPct val="112000"/>
-              </a:lnSpc>
-              <a:buNone/>
-            </a:pPr>
-            <a:r>
-              <a:rPr lang="en-US" sz="1300" dirty="0">
-                <a:solidFill>
-                  <a:srgbClr val="1A1A1A"/>
-                </a:solidFill>
-                <a:latin typeface="Consolas" pitchFamily="34" charset="0"/>
-                <a:ea typeface="Consolas" pitchFamily="34" charset="-122"/>
-                <a:cs typeface="Consolas" pitchFamily="34" charset="-120"/>
-              </a:rPr>
-              <a:t>0.0</a:t>
-            </a:r>
-            <a:pPr indent="0" marL="0">
-              <a:lnSpc>
-                <a:spcPct val="112000"/>
-              </a:lnSpc>
-              <a:buNone/>
-            </a:pPr>
-            <a:r>
-              <a:rPr lang="en-US" sz="1300" dirty="0">
-                <a:solidFill>
-                  <a:srgbClr val="000000"/>
-                </a:solidFill>
-              </a:rPr>
-              <a:t>
-</a:t>
-            </a:r>
-            <a:pPr indent="0" marL="0">
-              <a:lnSpc>
-                <a:spcPct val="112000"/>
-              </a:lnSpc>
-              <a:buNone/>
-            </a:pPr>
-            <a:r>
-              <a:rPr lang="en-US" sz="1300" b="1" dirty="0">
-                <a:solidFill>
-                  <a:srgbClr val="1B3A5C"/>
-                </a:solidFill>
-                <a:latin typeface="Consolas" pitchFamily="34" charset="0"/>
-                <a:ea typeface="Consolas" pitchFamily="34" charset="-122"/>
-                <a:cs typeface="Consolas" pitchFamily="34" charset="-120"/>
-              </a:rPr>
-              <a:t>meu_carro</a:t>
-            </a:r>
-            <a:pPr indent="0" marL="0">
-              <a:lnSpc>
-                <a:spcPct val="112000"/>
-              </a:lnSpc>
-              <a:buNone/>
-            </a:pPr>
-            <a:r>
-              <a:rPr lang="en-US" sz="1300" dirty="0">
-                <a:solidFill>
-                  <a:srgbClr val="5B6B7A"/>
-                </a:solidFill>
-                <a:latin typeface="Consolas" pitchFamily="34" charset="0"/>
-                <a:ea typeface="Consolas" pitchFamily="34" charset="-122"/>
-                <a:cs typeface="Consolas" pitchFamily="34" charset="-120"/>
-              </a:rPr>
-              <a:t>  →  </a:t>
-            </a:r>
-            <a:pPr indent="0" marL="0">
-              <a:lnSpc>
-                <a:spcPct val="112000"/>
-              </a:lnSpc>
-              <a:buNone/>
-            </a:pPr>
-            <a:r>
-              <a:rPr lang="en-US" sz="1300" dirty="0">
-                <a:solidFill>
-                  <a:srgbClr val="1A1A1A"/>
-                </a:solidFill>
-                <a:latin typeface="Consolas" pitchFamily="34" charset="0"/>
-                <a:ea typeface="Consolas" pitchFamily="34" charset="-122"/>
-                <a:cs typeface="Consolas" pitchFamily="34" charset="-120"/>
-              </a:rPr>
-              <a:t>Carro("Toyota", "Corolla", 2023, 0.0)  (uma instância do tipo Carro)</a:t>
-            </a:r>
-            <a:endParaRPr lang="en-US" sz="1300" dirty="0"/>
-          </a:p>
-        </p:txBody>
-      </p:sp>
-    </p:spTree>
-  </p:cSld>
-  <p:clrMapOvr>
-    <a:masterClrMapping/>
-  </p:clrMapOvr>
-</p:sld>
-</file>
-
-<file path=ppt/slides/slide9.xml><?xml version="1.0" encoding="utf-8"?>
-<p:sld xmlns:a="http://schemas.openxmlformats.org/drawingml/2006/main" xmlns:r="http://schemas.openxmlformats.org/officeDocument/2006/relationships" xmlns:p="http://schemas.openxmlformats.org/presentationml/2006/main">
-  <p:cSld name="Slide 3">
-    <p:bg>
-      <p:bgPr>
-        <a:solidFill>
-          <a:srgbClr val="FFFFFF"/>
-        </a:solidFill>
-      </p:bgPr>
-    </p:bg>
-    <p:spTree>
-      <p:nvGrpSpPr>
-        <p:cNvPr id="1" name=""/>
-        <p:cNvGrpSpPr/>
-        <p:nvPr/>
-      </p:nvGrpSpPr>
-      <p:grpSpPr>
-        <a:xfrm>
-          <a:off x="0" y="0"/>
-          <a:ext cx="0" cy="0"/>
-          <a:chOff x="0" y="0"/>
-          <a:chExt cx="0" cy="0"/>
-        </a:xfrm>
-      </p:grpSpPr>
-      <p:sp>
-        <p:nvSpPr>
-          <p:cNvPr id="2" name="Text 0"/>
-          <p:cNvSpPr/>
-          <p:nvPr/>
-        </p:nvSpPr>
-        <p:spPr>
-          <a:xfrm>
-            <a:off x="502920" y="320040"/>
-            <a:ext cx="11185855" cy="365760"/>
-          </a:xfrm>
-          <a:prstGeom prst="rect">
-            <a:avLst/>
-          </a:prstGeom>
-          <a:noFill/>
-          <a:ln/>
-        </p:spPr>
-        <p:txBody>
-          <a:bodyPr wrap="square" rtlCol="0" anchor="ctr"/>
-          <a:lstStyle/>
-          <a:p>
-            <a:pPr indent="0" marL="0">
-              <a:buNone/>
-            </a:pPr>
-            <a:r>
-              <a:rPr lang="en-US" sz="1300" b="1" spc="200" kern="0" dirty="0">
-                <a:solidFill>
-                  <a:srgbClr val="B5651D"/>
-                </a:solidFill>
-                <a:latin typeface="Calibri" pitchFamily="34" charset="0"/>
-                <a:ea typeface="Calibri" pitchFamily="34" charset="-122"/>
-                <a:cs typeface="Calibri" pitchFamily="34" charset="-120"/>
-              </a:rPr>
-              <a:t>AULA 11  ·  Exemplo — Criando e Modificando</a:t>
-            </a:r>
-            <a:endParaRPr lang="en-US" sz="1300" dirty="0"/>
-          </a:p>
-        </p:txBody>
-      </p:sp>
-      <p:sp>
-        <p:nvSpPr>
-          <p:cNvPr id="3" name="Text 1"/>
-          <p:cNvSpPr/>
-          <p:nvPr/>
-        </p:nvSpPr>
-        <p:spPr>
-          <a:xfrm>
-            <a:off x="502920" y="658368"/>
-            <a:ext cx="11185855" cy="502920"/>
-          </a:xfrm>
-          <a:prstGeom prst="rect">
-            <a:avLst/>
-          </a:prstGeom>
-          <a:noFill/>
-          <a:ln/>
-        </p:spPr>
-        <p:txBody>
-          <a:bodyPr wrap="square" rtlCol="0" anchor="ctr"/>
-          <a:lstStyle/>
-          <a:p>
-            <a:pPr indent="0" marL="0">
-              <a:buNone/>
-            </a:pPr>
-            <a:r>
-              <a:rPr lang="en-US" sz="1900" b="1" dirty="0">
-                <a:solidFill>
-                  <a:srgbClr val="1B3A5C"/>
-                </a:solidFill>
-                <a:latin typeface="Calibri" pitchFamily="34" charset="0"/>
-                <a:ea typeface="Calibri" pitchFamily="34" charset="-122"/>
-                <a:cs typeface="Calibri" pitchFamily="34" charset="-120"/>
-              </a:rPr>
-              <a:t>Como criar e depois modificar uma instância mutável?</a:t>
-            </a:r>
-            <a:endParaRPr lang="en-US" sz="1900" dirty="0"/>
-          </a:p>
-        </p:txBody>
-      </p:sp>
-      <p:sp>
-        <p:nvSpPr>
-          <p:cNvPr id="4" name="Shape 2"/>
-          <p:cNvSpPr/>
-          <p:nvPr/>
-        </p:nvSpPr>
-        <p:spPr>
-          <a:xfrm>
-            <a:off x="502920" y="1298448"/>
-            <a:ext cx="11185855" cy="2331720"/>
-          </a:xfrm>
-          <a:prstGeom prst="rect">
-            <a:avLst/>
-          </a:prstGeom>
-          <a:solidFill>
-            <a:srgbClr val="F2F4F7"/>
-          </a:solidFill>
-          <a:ln w="9525">
-            <a:solidFill>
-              <a:srgbClr val="C7CFDA"/>
-            </a:solidFill>
-            <a:prstDash val="solid"/>
-          </a:ln>
-        </p:spPr>
-      </p:sp>
-      <p:sp>
-        <p:nvSpPr>
-          <p:cNvPr id="5" name="Shape 3"/>
-          <p:cNvSpPr/>
-          <p:nvPr/>
-        </p:nvSpPr>
-        <p:spPr>
-          <a:xfrm>
-            <a:off x="502920" y="1298448"/>
-            <a:ext cx="54864" cy="2331720"/>
-          </a:xfrm>
-          <a:prstGeom prst="rect">
-            <a:avLst/>
-          </a:prstGeom>
-          <a:solidFill>
-            <a:srgbClr val="2C7A8C"/>
-          </a:solidFill>
-          <a:ln/>
-        </p:spPr>
-      </p:sp>
-      <p:sp>
-        <p:nvSpPr>
-          <p:cNvPr id="6" name="Text 4"/>
-          <p:cNvSpPr/>
-          <p:nvPr/>
-        </p:nvSpPr>
-        <p:spPr>
-          <a:xfrm>
-            <a:off x="731520" y="1371600"/>
-            <a:ext cx="10728655" cy="2185416"/>
-          </a:xfrm>
-          <a:prstGeom prst="rect">
-            <a:avLst/>
-          </a:prstGeom>
-          <a:noFill/>
-          <a:ln/>
-        </p:spPr>
-        <p:txBody>
-          <a:bodyPr wrap="square" rtlCol="0" anchor="t"/>
-          <a:lstStyle/>
-          <a:p>
-            <a:pPr indent="0" marL="0">
-              <a:lnSpc>
-                <a:spcPct val="115000"/>
-              </a:lnSpc>
-              <a:buNone/>
-            </a:pPr>
-            <a:r>
-              <a:rPr lang="en-US" sz="1100" dirty="0">
-                <a:solidFill>
-                  <a:srgbClr val="1A1A1A"/>
-                </a:solidFill>
-                <a:latin typeface="Consolas" pitchFamily="34" charset="0"/>
-                <a:ea typeface="Consolas" pitchFamily="34" charset="-122"/>
-                <a:cs typeface="Consolas" pitchFamily="34" charset="-120"/>
-              </a:rPr>
-              <a:t>ContaBancaria</a:t>
-            </a:r>
-            <a:endParaRPr lang="en-US" sz="1100" dirty="0"/>
-          </a:p>
-          <a:p>
-            <a:pPr indent="0" marL="0">
-              <a:lnSpc>
-                <a:spcPct val="115000"/>
-              </a:lnSpc>
-              <a:buNone/>
-            </a:pPr>
-            <a:r>
-              <a:rPr lang="en-US" sz="1100" dirty="0">
-                <a:solidFill>
-                  <a:srgbClr val="1A1A1A"/>
-                </a:solidFill>
-                <a:latin typeface="Consolas" pitchFamily="34" charset="0"/>
-                <a:ea typeface="Consolas" pitchFamily="34" charset="-122"/>
-                <a:cs typeface="Consolas" pitchFamily="34" charset="-120"/>
-              </a:rPr>
-              <a:t>    titular::CadeiaDeCaractere</a:t>
-            </a:r>
-            <a:endParaRPr lang="en-US" sz="1100" dirty="0"/>
-          </a:p>
-          <a:p>
-            <a:pPr indent="0" marL="0">
-              <a:lnSpc>
-                <a:spcPct val="115000"/>
-              </a:lnSpc>
-              <a:buNone/>
-            </a:pPr>
-            <a:r>
-              <a:rPr lang="en-US" sz="1100" dirty="0">
-                <a:solidFill>
-                  <a:srgbClr val="1A1A1A"/>
-                </a:solidFill>
-                <a:latin typeface="Consolas" pitchFamily="34" charset="0"/>
-                <a:ea typeface="Consolas" pitchFamily="34" charset="-122"/>
-                <a:cs typeface="Consolas" pitchFamily="34" charset="-120"/>
-              </a:rPr>
-              <a:t>    saldo::Número</a:t>
-            </a:r>
-            <a:endParaRPr lang="en-US" sz="1100" dirty="0"/>
-          </a:p>
-          <a:p>
-            <a:pPr indent="0" marL="0">
-              <a:lnSpc>
-                <a:spcPct val="115000"/>
-              </a:lnSpc>
-              <a:buNone/>
-            </a:pPr>
-            <a:r>
-              <a:rPr lang="en-US" sz="1100" dirty="0">
-                <a:solidFill>
-                  <a:srgbClr val="1A1A1A"/>
-                </a:solidFill>
-                <a:latin typeface="Consolas" pitchFamily="34" charset="0"/>
-                <a:ea typeface="Consolas" pitchFamily="34" charset="-122"/>
-                <a:cs typeface="Consolas" pitchFamily="34" charset="-120"/>
-              </a:rPr>
-              <a:t>    ativa::VerdadeiroOuFalso</a:t>
-            </a:r>
-            <a:endParaRPr lang="en-US" sz="1100" dirty="0"/>
-          </a:p>
-          <a:p>
-            <a:pPr indent="0" marL="0">
-              <a:lnSpc>
-                <a:spcPct val="115000"/>
-              </a:lnSpc>
-              <a:buNone/>
-            </a:pPr>
-            <a:r>
-              <a:rPr lang="en-US" sz="1100" dirty="0">
-                <a:solidFill>
-                  <a:srgbClr val="1A1A1A"/>
-                </a:solidFill>
-                <a:latin typeface="Consolas" pitchFamily="34" charset="0"/>
-                <a:ea typeface="Consolas" pitchFamily="34" charset="-122"/>
-                <a:cs typeface="Consolas" pitchFamily="34" charset="-120"/>
-              </a:rPr>
-              <a:t>fim</a:t>
-            </a:r>
-            <a:endParaRPr lang="en-US" sz="1100" dirty="0"/>
-          </a:p>
-          <a:p>
-            <a:pPr indent="0" marL="0">
-              <a:lnSpc>
-                <a:spcPct val="115000"/>
-              </a:lnSpc>
-              <a:buNone/>
-            </a:pPr>
-            <a:endParaRPr lang="en-US" sz="1100" dirty="0"/>
-          </a:p>
-          <a:p>
-            <a:pPr indent="0" marL="0">
-              <a:lnSpc>
-                <a:spcPct val="115000"/>
-              </a:lnSpc>
-              <a:buNone/>
-            </a:pPr>
-            <a:r>
-              <a:rPr lang="en-US" sz="1100" dirty="0">
-                <a:solidFill>
-                  <a:srgbClr val="1A1A1A"/>
-                </a:solidFill>
-                <a:latin typeface="Consolas" pitchFamily="34" charset="0"/>
-                <a:ea typeface="Consolas" pitchFamily="34" charset="-122"/>
-                <a:cs typeface="Consolas" pitchFamily="34" charset="-120"/>
-              </a:rPr>
-              <a:t>conta = ContaBancaria("Maria Silva", 1000.0, verdadeiro)</a:t>
-            </a:r>
-            <a:endParaRPr lang="en-US" sz="1100" dirty="0"/>
-          </a:p>
-          <a:p>
-            <a:pPr indent="0" marL="0">
-              <a:lnSpc>
-                <a:spcPct val="115000"/>
-              </a:lnSpc>
-              <a:buNone/>
-            </a:pPr>
-            <a:endParaRPr lang="en-US" sz="1100" dirty="0"/>
-          </a:p>
-          <a:p>
-            <a:pPr indent="0" marL="0">
-              <a:lnSpc>
-                <a:spcPct val="115000"/>
-              </a:lnSpc>
-              <a:buNone/>
-            </a:pPr>
-            <a:r>
-              <a:rPr lang="en-US" sz="1100" dirty="0">
-                <a:solidFill>
-                  <a:srgbClr val="1A1A1A"/>
-                </a:solidFill>
-                <a:latin typeface="Consolas" pitchFamily="34" charset="0"/>
-                <a:ea typeface="Consolas" pitchFamily="34" charset="-122"/>
-                <a:cs typeface="Consolas" pitchFamily="34" charset="-120"/>
-              </a:rPr>
-              <a:t># Agora podemos modificar!</a:t>
-            </a:r>
-            <a:endParaRPr lang="en-US" sz="1100" dirty="0"/>
-          </a:p>
-          <a:p>
-            <a:pPr indent="0" marL="0">
-              <a:lnSpc>
-                <a:spcPct val="115000"/>
-              </a:lnSpc>
-              <a:buNone/>
-            </a:pPr>
-            <a:r>
-              <a:rPr lang="en-US" sz="1100" dirty="0">
-                <a:solidFill>
-                  <a:srgbClr val="1A1A1A"/>
-                </a:solidFill>
-                <a:latin typeface="Consolas" pitchFamily="34" charset="0"/>
-                <a:ea typeface="Consolas" pitchFamily="34" charset="-122"/>
-                <a:cs typeface="Consolas" pitchFamily="34" charset="-120"/>
-              </a:rPr>
-              <a:t>conta.saldo = 1500.0</a:t>
-            </a:r>
-            <a:endParaRPr lang="en-US" sz="1100" dirty="0"/>
-          </a:p>
-          <a:p>
-            <a:pPr indent="0" marL="0">
-              <a:lnSpc>
-                <a:spcPct val="115000"/>
-              </a:lnSpc>
-              <a:buNone/>
-            </a:pPr>
-            <a:r>
-              <a:rPr lang="en-US" sz="1100" dirty="0">
-                <a:solidFill>
-                  <a:srgbClr val="1A1A1A"/>
-                </a:solidFill>
-                <a:latin typeface="Consolas" pitchFamily="34" charset="0"/>
-                <a:ea typeface="Consolas" pitchFamily="34" charset="-122"/>
-                <a:cs typeface="Consolas" pitchFamily="34" charset="-120"/>
-              </a:rPr>
-              <a:t>conta.ativa = falso</a:t>
-            </a:r>
-            <a:endParaRPr lang="en-US" sz="1100" dirty="0"/>
-          </a:p>
-        </p:txBody>
-      </p:sp>
-      <p:sp>
-        <p:nvSpPr>
-          <p:cNvPr id="7" name="Shape 5"/>
-          <p:cNvSpPr/>
-          <p:nvPr/>
-        </p:nvSpPr>
-        <p:spPr>
-          <a:xfrm>
-            <a:off x="502920" y="3794760"/>
-            <a:ext cx="11185855" cy="2743200"/>
-          </a:xfrm>
-          <a:prstGeom prst="rect">
-            <a:avLst/>
-          </a:prstGeom>
-          <a:solidFill>
-            <a:srgbClr val="EFF5F1"/>
-          </a:solidFill>
-          <a:ln w="9525">
-            <a:solidFill>
-              <a:srgbClr val="C7CFDA"/>
-            </a:solidFill>
-            <a:prstDash val="solid"/>
-          </a:ln>
-        </p:spPr>
-      </p:sp>
-      <p:sp>
-        <p:nvSpPr>
-          <p:cNvPr id="8" name="Shape 6"/>
-          <p:cNvSpPr/>
-          <p:nvPr/>
-        </p:nvSpPr>
-        <p:spPr>
-          <a:xfrm>
-            <a:off x="502920" y="3794760"/>
-            <a:ext cx="54864" cy="2743200"/>
-          </a:xfrm>
-          <a:prstGeom prst="rect">
-            <a:avLst/>
-          </a:prstGeom>
-          <a:solidFill>
-            <a:srgbClr val="2C7A8C"/>
-          </a:solidFill>
-          <a:ln/>
-        </p:spPr>
-      </p:sp>
-      <p:sp>
-        <p:nvSpPr>
-          <p:cNvPr id="9" name="Text 7"/>
-          <p:cNvSpPr/>
-          <p:nvPr/>
-        </p:nvSpPr>
-        <p:spPr>
-          <a:xfrm>
-            <a:off x="731520" y="3886200"/>
-            <a:ext cx="10728655" cy="2560320"/>
-          </a:xfrm>
-          <a:prstGeom prst="rect">
-            <a:avLst/>
-          </a:prstGeom>
-          <a:noFill/>
-          <a:ln/>
-        </p:spPr>
-        <p:txBody>
-          <a:bodyPr wrap="square" rtlCol="0" anchor="t"/>
-          <a:lstStyle/>
-          <a:p>
-            <a:pPr indent="0" marL="0">
-              <a:lnSpc>
-                <a:spcPct val="112000"/>
-              </a:lnSpc>
-              <a:buNone/>
-            </a:pPr>
-            <a:r>
-              <a:rPr lang="en-US" sz="1300" b="1" dirty="0">
-                <a:solidFill>
-                  <a:srgbClr val="1B3A5C"/>
-                </a:solidFill>
-                <a:latin typeface="Consolas" pitchFamily="34" charset="0"/>
-                <a:ea typeface="Consolas" pitchFamily="34" charset="-122"/>
-                <a:cs typeface="Consolas" pitchFamily="34" charset="-120"/>
-              </a:rPr>
-              <a:t>ContaBancaria(...)</a:t>
-            </a:r>
-            <a:pPr indent="0" marL="0">
-              <a:lnSpc>
-                <a:spcPct val="112000"/>
-              </a:lnSpc>
-              <a:buNone/>
-            </a:pPr>
-            <a:r>
-              <a:rPr lang="en-US" sz="1300" dirty="0">
-                <a:solidFill>
-                  <a:srgbClr val="5B6B7A"/>
-                </a:solidFill>
-                <a:latin typeface="Consolas" pitchFamily="34" charset="0"/>
-                <a:ea typeface="Consolas" pitchFamily="34" charset="-122"/>
-                <a:cs typeface="Consolas" pitchFamily="34" charset="-120"/>
-              </a:rPr>
-              <a:t>  →  </a:t>
-            </a:r>
-            <a:pPr indent="0" marL="0">
-              <a:lnSpc>
-                <a:spcPct val="112000"/>
-              </a:lnSpc>
-              <a:buNone/>
-            </a:pPr>
-            <a:r>
-              <a:rPr lang="en-US" sz="1300" dirty="0">
-                <a:solidFill>
-                  <a:srgbClr val="1A1A1A"/>
-                </a:solidFill>
-                <a:latin typeface="Consolas" pitchFamily="34" charset="0"/>
-                <a:ea typeface="Consolas" pitchFamily="34" charset="-122"/>
-                <a:cs typeface="Consolas" pitchFamily="34" charset="-120"/>
-              </a:rPr>
-              <a:t>chama o construtor, associando cada argumento posicional ao campo correspondente:</a:t>
-            </a:r>
-            <a:pPr indent="0" marL="0">
-              <a:lnSpc>
-                <a:spcPct val="112000"/>
-              </a:lnSpc>
-              <a:buNone/>
-            </a:pPr>
-            <a:r>
-              <a:rPr lang="en-US" sz="1300" dirty="0">
-                <a:solidFill>
-                  <a:srgbClr val="000000"/>
-                </a:solidFill>
-              </a:rPr>
-              <a:t>
-</a:t>
-            </a:r>
-            <a:pPr indent="0" marL="0">
-              <a:lnSpc>
-                <a:spcPct val="112000"/>
-              </a:lnSpc>
-              <a:buNone/>
-            </a:pPr>
-            <a:r>
-              <a:rPr lang="en-US" sz="1300" b="1" dirty="0">
-                <a:solidFill>
-                  <a:srgbClr val="1B3A5C"/>
-                </a:solidFill>
-                <a:latin typeface="Consolas" pitchFamily="34" charset="0"/>
-                <a:ea typeface="Consolas" pitchFamily="34" charset="-122"/>
-                <a:cs typeface="Consolas" pitchFamily="34" charset="-120"/>
-              </a:rPr>
-              <a:t>titular</a:t>
-            </a:r>
-            <a:pPr indent="0" marL="0">
-              <a:lnSpc>
-                <a:spcPct val="112000"/>
-              </a:lnSpc>
-              <a:buNone/>
-            </a:pPr>
-            <a:r>
-              <a:rPr lang="en-US" sz="1300" dirty="0">
-                <a:solidFill>
-                  <a:srgbClr val="5B6B7A"/>
-                </a:solidFill>
-                <a:latin typeface="Consolas" pitchFamily="34" charset="0"/>
-                <a:ea typeface="Consolas" pitchFamily="34" charset="-122"/>
-                <a:cs typeface="Consolas" pitchFamily="34" charset="-120"/>
-              </a:rPr>
-              <a:t>  →  </a:t>
-            </a:r>
-            <a:pPr indent="0" marL="0">
-              <a:lnSpc>
-                <a:spcPct val="112000"/>
-              </a:lnSpc>
-              <a:buNone/>
-            </a:pPr>
-            <a:r>
-              <a:rPr lang="en-US" sz="1300" dirty="0">
-                <a:solidFill>
-                  <a:srgbClr val="1A1A1A"/>
-                </a:solidFill>
-                <a:latin typeface="Consolas" pitchFamily="34" charset="0"/>
-                <a:ea typeface="Consolas" pitchFamily="34" charset="-122"/>
-                <a:cs typeface="Consolas" pitchFamily="34" charset="-120"/>
-              </a:rPr>
-              <a:t>"Maria Silva"</a:t>
-            </a:r>
-            <a:pPr indent="0" marL="0">
-              <a:lnSpc>
-                <a:spcPct val="112000"/>
-              </a:lnSpc>
-              <a:buNone/>
-            </a:pPr>
-            <a:r>
-              <a:rPr lang="en-US" sz="1300" dirty="0">
-                <a:solidFill>
-                  <a:srgbClr val="000000"/>
-                </a:solidFill>
-              </a:rPr>
-              <a:t>
-</a:t>
-            </a:r>
-            <a:pPr indent="0" marL="0">
-              <a:lnSpc>
-                <a:spcPct val="112000"/>
-              </a:lnSpc>
-              <a:buNone/>
-            </a:pPr>
-            <a:r>
-              <a:rPr lang="en-US" sz="1300" b="1" dirty="0">
-                <a:solidFill>
-                  <a:srgbClr val="1B3A5C"/>
-                </a:solidFill>
-                <a:latin typeface="Consolas" pitchFamily="34" charset="0"/>
-                <a:ea typeface="Consolas" pitchFamily="34" charset="-122"/>
-                <a:cs typeface="Consolas" pitchFamily="34" charset="-120"/>
-              </a:rPr>
-              <a:t>saldo</a:t>
-            </a:r>
-            <a:pPr indent="0" marL="0">
-              <a:lnSpc>
-                <a:spcPct val="112000"/>
-              </a:lnSpc>
-              <a:buNone/>
-            </a:pPr>
-            <a:r>
-              <a:rPr lang="en-US" sz="1300" dirty="0">
-                <a:solidFill>
-                  <a:srgbClr val="5B6B7A"/>
-                </a:solidFill>
-                <a:latin typeface="Consolas" pitchFamily="34" charset="0"/>
-                <a:ea typeface="Consolas" pitchFamily="34" charset="-122"/>
-                <a:cs typeface="Consolas" pitchFamily="34" charset="-120"/>
-              </a:rPr>
-              <a:t>  →  </a:t>
-            </a:r>
-            <a:pPr indent="0" marL="0">
-              <a:lnSpc>
-                <a:spcPct val="112000"/>
-              </a:lnSpc>
-              <a:buNone/>
-            </a:pPr>
-            <a:r>
-              <a:rPr lang="en-US" sz="1300" dirty="0">
-                <a:solidFill>
-                  <a:srgbClr val="1A1A1A"/>
-                </a:solidFill>
-                <a:latin typeface="Consolas" pitchFamily="34" charset="0"/>
-                <a:ea typeface="Consolas" pitchFamily="34" charset="-122"/>
-                <a:cs typeface="Consolas" pitchFamily="34" charset="-120"/>
-              </a:rPr>
-              <a:t>1000.0</a:t>
-            </a:r>
-            <a:pPr indent="0" marL="0">
-              <a:lnSpc>
-                <a:spcPct val="112000"/>
-              </a:lnSpc>
-              <a:buNone/>
-            </a:pPr>
-            <a:r>
-              <a:rPr lang="en-US" sz="1300" dirty="0">
-                <a:solidFill>
-                  <a:srgbClr val="000000"/>
-                </a:solidFill>
-              </a:rPr>
-              <a:t>
-</a:t>
-            </a:r>
-            <a:pPr indent="0" marL="0">
-              <a:lnSpc>
-                <a:spcPct val="112000"/>
-              </a:lnSpc>
-              <a:buNone/>
-            </a:pPr>
-            <a:r>
-              <a:rPr lang="en-US" sz="1300" b="1" dirty="0">
-                <a:solidFill>
-                  <a:srgbClr val="1B3A5C"/>
-                </a:solidFill>
-                <a:latin typeface="Consolas" pitchFamily="34" charset="0"/>
-                <a:ea typeface="Consolas" pitchFamily="34" charset="-122"/>
-                <a:cs typeface="Consolas" pitchFamily="34" charset="-120"/>
-              </a:rPr>
-              <a:t>ativa</a:t>
-            </a:r>
-            <a:pPr indent="0" marL="0">
-              <a:lnSpc>
-                <a:spcPct val="112000"/>
-              </a:lnSpc>
-              <a:buNone/>
-            </a:pPr>
-            <a:r>
-              <a:rPr lang="en-US" sz="1300" dirty="0">
-                <a:solidFill>
-                  <a:srgbClr val="5B6B7A"/>
-                </a:solidFill>
-                <a:latin typeface="Consolas" pitchFamily="34" charset="0"/>
-                <a:ea typeface="Consolas" pitchFamily="34" charset="-122"/>
-                <a:cs typeface="Consolas" pitchFamily="34" charset="-120"/>
-              </a:rPr>
-              <a:t>  →  </a:t>
-            </a:r>
-            <a:pPr indent="0" marL="0">
-              <a:lnSpc>
-                <a:spcPct val="112000"/>
-              </a:lnSpc>
-              <a:buNone/>
-            </a:pPr>
-            <a:r>
-              <a:rPr lang="en-US" sz="1300" dirty="0">
-                <a:solidFill>
-                  <a:srgbClr val="1A1A1A"/>
-                </a:solidFill>
-                <a:latin typeface="Consolas" pitchFamily="34" charset="0"/>
-                <a:ea typeface="Consolas" pitchFamily="34" charset="-122"/>
-                <a:cs typeface="Consolas" pitchFamily="34" charset="-120"/>
-              </a:rPr>
-              <a:t>verdadeiro (true)</a:t>
-            </a:r>
-            <a:pPr indent="0" marL="0">
-              <a:lnSpc>
-                <a:spcPct val="112000"/>
-              </a:lnSpc>
-              <a:buNone/>
-            </a:pPr>
-            <a:r>
-              <a:rPr lang="en-US" sz="1300" dirty="0">
-                <a:solidFill>
-                  <a:srgbClr val="000000"/>
-                </a:solidFill>
-              </a:rPr>
-              <a:t>
-</a:t>
-            </a:r>
-            <a:pPr indent="0" marL="0">
-              <a:lnSpc>
-                <a:spcPct val="112000"/>
-              </a:lnSpc>
-              <a:buNone/>
-            </a:pPr>
-            <a:r>
-              <a:rPr lang="en-US" sz="1300" b="1" dirty="0">
-                <a:solidFill>
-                  <a:srgbClr val="1B3A5C"/>
-                </a:solidFill>
-                <a:latin typeface="Consolas" pitchFamily="34" charset="0"/>
-                <a:ea typeface="Consolas" pitchFamily="34" charset="-122"/>
-                <a:cs typeface="Consolas" pitchFamily="34" charset="-120"/>
-              </a:rPr>
-              <a:t>conta</a:t>
-            </a:r>
-            <a:pPr indent="0" marL="0">
-              <a:lnSpc>
-                <a:spcPct val="112000"/>
-              </a:lnSpc>
-              <a:buNone/>
-            </a:pPr>
-            <a:r>
-              <a:rPr lang="en-US" sz="1300" dirty="0">
-                <a:solidFill>
-                  <a:srgbClr val="5B6B7A"/>
-                </a:solidFill>
-                <a:latin typeface="Consolas" pitchFamily="34" charset="0"/>
-                <a:ea typeface="Consolas" pitchFamily="34" charset="-122"/>
-                <a:cs typeface="Consolas" pitchFamily="34" charset="-120"/>
-              </a:rPr>
-              <a:t>  →  </a:t>
-            </a:r>
-            <a:pPr indent="0" marL="0">
-              <a:lnSpc>
-                <a:spcPct val="112000"/>
-              </a:lnSpc>
-              <a:buNone/>
-            </a:pPr>
-            <a:r>
-              <a:rPr lang="en-US" sz="1300" dirty="0">
-                <a:solidFill>
-                  <a:srgbClr val="1A1A1A"/>
-                </a:solidFill>
-                <a:latin typeface="Consolas" pitchFamily="34" charset="0"/>
-                <a:ea typeface="Consolas" pitchFamily="34" charset="-122"/>
-                <a:cs typeface="Consolas" pitchFamily="34" charset="-120"/>
-              </a:rPr>
-              <a:t>ContaBancaria("Maria Silva", 1000.0, verdadeiro)  (uma instância mutável)</a:t>
-            </a:r>
-            <a:pPr indent="0" marL="0">
-              <a:lnSpc>
-                <a:spcPct val="112000"/>
-              </a:lnSpc>
-              <a:buNone/>
-            </a:pPr>
-            <a:r>
-              <a:rPr lang="en-US" sz="1300" dirty="0">
-                <a:solidFill>
-                  <a:srgbClr val="000000"/>
-                </a:solidFill>
-              </a:rPr>
-              <a:t>
-</a:t>
-            </a:r>
-            <a:pPr indent="0" marL="0">
-              <a:lnSpc>
-                <a:spcPct val="112000"/>
-              </a:lnSpc>
-              <a:buNone/>
-            </a:pPr>
-            <a:r>
-              <a:rPr lang="en-US" sz="1300" b="1" dirty="0">
-                <a:solidFill>
-                  <a:srgbClr val="1B3A5C"/>
-                </a:solidFill>
-                <a:latin typeface="Consolas" pitchFamily="34" charset="0"/>
-                <a:ea typeface="Consolas" pitchFamily="34" charset="-122"/>
-                <a:cs typeface="Consolas" pitchFamily="34" charset="-120"/>
-              </a:rPr>
-              <a:t>conta.saldo = 1500.0</a:t>
-            </a:r>
-            <a:pPr indent="0" marL="0">
-              <a:lnSpc>
-                <a:spcPct val="112000"/>
-              </a:lnSpc>
-              <a:buNone/>
-            </a:pPr>
-            <a:r>
-              <a:rPr lang="en-US" sz="1300" dirty="0">
-                <a:solidFill>
-                  <a:srgbClr val="5B6B7A"/>
-                </a:solidFill>
-                <a:latin typeface="Consolas" pitchFamily="34" charset="0"/>
-                <a:ea typeface="Consolas" pitchFamily="34" charset="-122"/>
-                <a:cs typeface="Consolas" pitchFamily="34" charset="-120"/>
-              </a:rPr>
-              <a:t>  →  </a:t>
-            </a:r>
-            <a:pPr indent="0" marL="0">
-              <a:lnSpc>
-                <a:spcPct val="112000"/>
-              </a:lnSpc>
-              <a:buNone/>
-            </a:pPr>
-            <a:r>
-              <a:rPr lang="en-US" sz="1300" dirty="0">
-                <a:solidFill>
-                  <a:srgbClr val="1A1A1A"/>
-                </a:solidFill>
-                <a:latin typeface="Consolas" pitchFamily="34" charset="0"/>
-                <a:ea typeface="Consolas" pitchFamily="34" charset="-122"/>
-                <a:cs typeface="Consolas" pitchFamily="34" charset="-120"/>
-              </a:rPr>
-              <a:t>sobrescreve o campo saldo — conta passa a ter saldo = 1500.0</a:t>
-            </a:r>
-            <a:pPr indent="0" marL="0">
-              <a:lnSpc>
-                <a:spcPct val="112000"/>
-              </a:lnSpc>
-              <a:buNone/>
-            </a:pPr>
-            <a:r>
-              <a:rPr lang="en-US" sz="1300" dirty="0">
-                <a:solidFill>
-                  <a:srgbClr val="000000"/>
-                </a:solidFill>
-              </a:rPr>
-              <a:t>
-</a:t>
-            </a:r>
-            <a:pPr indent="0" marL="0">
-              <a:lnSpc>
-                <a:spcPct val="112000"/>
-              </a:lnSpc>
-              <a:buNone/>
-            </a:pPr>
-            <a:r>
-              <a:rPr lang="en-US" sz="1300" b="1" dirty="0">
-                <a:solidFill>
-                  <a:srgbClr val="1B3A5C"/>
-                </a:solidFill>
-                <a:latin typeface="Consolas" pitchFamily="34" charset="0"/>
-                <a:ea typeface="Consolas" pitchFamily="34" charset="-122"/>
-                <a:cs typeface="Consolas" pitchFamily="34" charset="-120"/>
-              </a:rPr>
-              <a:t>conta.ativa = falso</a:t>
-            </a:r>
-            <a:pPr indent="0" marL="0">
-              <a:lnSpc>
-                <a:spcPct val="112000"/>
-              </a:lnSpc>
-              <a:buNone/>
-            </a:pPr>
-            <a:r>
-              <a:rPr lang="en-US" sz="1300" dirty="0">
-                <a:solidFill>
-                  <a:srgbClr val="5B6B7A"/>
-                </a:solidFill>
-                <a:latin typeface="Consolas" pitchFamily="34" charset="0"/>
-                <a:ea typeface="Consolas" pitchFamily="34" charset="-122"/>
-                <a:cs typeface="Consolas" pitchFamily="34" charset="-120"/>
-              </a:rPr>
-              <a:t>  →  </a:t>
-            </a:r>
-            <a:pPr indent="0" marL="0">
-              <a:lnSpc>
-                <a:spcPct val="112000"/>
-              </a:lnSpc>
-              <a:buNone/>
-            </a:pPr>
-            <a:r>
-              <a:rPr lang="en-US" sz="1300" dirty="0">
-                <a:solidFill>
-                  <a:srgbClr val="1A1A1A"/>
-                </a:solidFill>
-                <a:latin typeface="Consolas" pitchFamily="34" charset="0"/>
-                <a:ea typeface="Consolas" pitchFamily="34" charset="-122"/>
-                <a:cs typeface="Consolas" pitchFamily="34" charset="-120"/>
-              </a:rPr>
-              <a:t>sobrescreve o campo ativa — conta passa a ter ativa = falso</a:t>
-            </a:r>
-            <a:endParaRPr lang="en-US" sz="1300" dirty="0"/>
           </a:p>
         </p:txBody>
       </p:sp>
